--- a/slides/organization.pptx
+++ b/slides/organization.pptx
@@ -280,7 +280,7 @@
               <a:pPr>
                 <a:defRPr/>
               </a:pPr>
-              <a:t>21-04-2025</a:t>
+              <a:t>10-04-2026</a:t>
             </a:fld>
             <a:endParaRPr lang="en-US"/>
           </a:p>
@@ -1610,7 +1610,7 @@
               <a:pPr>
                 <a:defRPr/>
               </a:pPr>
-              <a:t>21-04-2025</a:t>
+              <a:t>10-04-2026</a:t>
             </a:fld>
             <a:endParaRPr lang="en-US"/>
           </a:p>
@@ -1800,7 +1800,7 @@
               <a:pPr>
                 <a:defRPr/>
               </a:pPr>
-              <a:t>21-04-2025</a:t>
+              <a:t>10-04-2026</a:t>
             </a:fld>
             <a:endParaRPr lang="en-US"/>
           </a:p>
@@ -2000,7 +2000,7 @@
               <a:pPr>
                 <a:defRPr/>
               </a:pPr>
-              <a:t>21-04-2025</a:t>
+              <a:t>10-04-2026</a:t>
             </a:fld>
             <a:endParaRPr lang="en-US"/>
           </a:p>
@@ -2196,7 +2196,7 @@
               <a:pPr>
                 <a:defRPr/>
               </a:pPr>
-              <a:t>21-04-2025</a:t>
+              <a:t>10-04-2026</a:t>
             </a:fld>
             <a:endParaRPr lang="en-US"/>
           </a:p>
@@ -2463,7 +2463,7 @@
               <a:pPr>
                 <a:defRPr/>
               </a:pPr>
-              <a:t>21-04-2025</a:t>
+              <a:t>10-04-2026</a:t>
             </a:fld>
             <a:endParaRPr lang="en-US"/>
           </a:p>
@@ -2770,7 +2770,7 @@
               <a:pPr>
                 <a:defRPr/>
               </a:pPr>
-              <a:t>21-04-2025</a:t>
+              <a:t>10-04-2026</a:t>
             </a:fld>
             <a:endParaRPr lang="en-US"/>
           </a:p>
@@ -3211,7 +3211,7 @@
               <a:pPr>
                 <a:defRPr/>
               </a:pPr>
-              <a:t>21-04-2025</a:t>
+              <a:t>10-04-2026</a:t>
             </a:fld>
             <a:endParaRPr lang="en-US"/>
           </a:p>
@@ -3350,7 +3350,7 @@
               <a:pPr>
                 <a:defRPr/>
               </a:pPr>
-              <a:t>21-04-2025</a:t>
+              <a:t>10-04-2026</a:t>
             </a:fld>
             <a:endParaRPr lang="en-US"/>
           </a:p>
@@ -3467,7 +3467,7 @@
               <a:pPr>
                 <a:defRPr/>
               </a:pPr>
-              <a:t>21-04-2025</a:t>
+              <a:t>10-04-2026</a:t>
             </a:fld>
             <a:endParaRPr lang="en-US"/>
           </a:p>
@@ -3764,7 +3764,7 @@
               <a:pPr>
                 <a:defRPr/>
               </a:pPr>
-              <a:t>21-04-2025</a:t>
+              <a:t>10-04-2026</a:t>
             </a:fld>
             <a:endParaRPr lang="en-US"/>
           </a:p>
@@ -4041,7 +4041,7 @@
               <a:pPr>
                 <a:defRPr/>
               </a:pPr>
-              <a:t>21-04-2025</a:t>
+              <a:t>10-04-2026</a:t>
             </a:fld>
             <a:endParaRPr lang="en-US"/>
           </a:p>
@@ -4297,7 +4297,7 @@
               <a:pPr>
                 <a:defRPr/>
               </a:pPr>
-              <a:t>21-04-2025</a:t>
+              <a:t>10-04-2026</a:t>
             </a:fld>
             <a:endParaRPr lang="en-US"/>
           </a:p>
@@ -4896,7 +4896,7 @@
             </a:pPr>
             <a:r>
               <a:rPr lang="en-US" dirty="0"/>
-              <a:t>2024/25</a:t>
+              <a:t>2025/26</a:t>
             </a:r>
           </a:p>
           <a:p>
@@ -4907,24 +4907,12 @@
               <a:defRPr/>
             </a:pPr>
             <a:r>
-              <a:rPr lang="en-US" sz="2600" dirty="0" err="1"/>
-              <a:t>Wishnu</a:t>
-            </a:r>
-            <a:r>
               <a:rPr lang="en-US" sz="2600" dirty="0"/>
-              <a:t> </a:t>
-            </a:r>
-            <a:r>
-              <a:rPr lang="en-US" sz="2600" dirty="0" err="1"/>
-              <a:t>Prasetya</a:t>
-            </a:r>
-            <a:r>
-              <a:rPr lang="en-US" sz="2600" dirty="0"/>
-              <a:t> </a:t>
+              <a:t>Wishnu Prasetya </a:t>
             </a:r>
             <a:r>
               <a:rPr lang="en-US" sz="2800" dirty="0"/>
-              <a:t>&amp; Gabriele Keller</a:t>
+              <a:t>&amp; Paige North</a:t>
             </a:r>
             <a:endParaRPr lang="en-US" sz="2600" dirty="0"/>
           </a:p>
@@ -5012,7 +5000,22 @@
             <a:pPr eaLnBrk="1" hangingPunct="1"/>
             <a:r>
               <a:rPr lang="en-US" sz="2800" dirty="0"/>
-              <a:t>Software testing homework (3x).</a:t>
+              <a:t>Software testing </a:t>
+            </a:r>
+            <a:r>
+              <a:rPr lang="en-US" sz="2800" dirty="0" err="1"/>
+              <a:t>Quizz</a:t>
+            </a:r>
+            <a:r>
+              <a:rPr lang="en-US" sz="2800" dirty="0"/>
+              <a:t> (3x): you can redo them as many times as you want, BUT each has a closing date.</a:t>
+            </a:r>
+          </a:p>
+          <a:p>
+            <a:pPr eaLnBrk="1" hangingPunct="1"/>
+            <a:r>
+              <a:rPr lang="en-US" sz="2800" dirty="0"/>
+              <a:t>Writing formal specifications (3x): via MS-Team.</a:t>
             </a:r>
           </a:p>
           <a:p>
@@ -5162,11 +5165,11 @@
             </a:r>
             <a:r>
               <a:rPr lang="en-US" sz="2000" b="1" dirty="0"/>
-              <a:t>9 components</a:t>
+              <a:t>12 components</a:t>
             </a:r>
             <a:r>
               <a:rPr lang="en-US" sz="2000" dirty="0"/>
-              <a:t>: testing homework (3), </a:t>
+              <a:t>: quizzes (3), formal specifications (3), </a:t>
             </a:r>
             <a:r>
               <a:rPr lang="en-US" sz="2000" dirty="0">
@@ -5298,7 +5301,7 @@
             </a:r>
             <a:r>
               <a:rPr lang="en-US" sz="2000" dirty="0"/>
-              <a:t>  =   0.05 * </a:t>
+              <a:t>  =   0.025 * </a:t>
             </a:r>
             <a:r>
               <a:rPr lang="en-US" sz="2000" dirty="0">
@@ -5308,14 +5311,14 @@
                   </a:schemeClr>
                 </a:solidFill>
               </a:rPr>
-              <a:t>testing homework</a:t>
+              <a:t>formal specifications</a:t>
             </a:r>
             <a:br>
               <a:rPr lang="en-US" sz="2000" dirty="0"/>
             </a:br>
             <a:r>
               <a:rPr lang="en-US" sz="2000" dirty="0"/>
-              <a:t>           + 0.2   * </a:t>
+              <a:t>           + 0.225 * </a:t>
             </a:r>
             <a:r>
               <a:rPr lang="en-US" sz="2000" dirty="0">
@@ -5546,84 +5549,24 @@
           <a:p>
             <a:r>
               <a:rPr lang="en-US" sz="2400" dirty="0"/>
-              <a:t>Using AI like </a:t>
-            </a:r>
-            <a:r>
-              <a:rPr lang="en-US" sz="2400" dirty="0" err="1"/>
-              <a:t>ChatGPT</a:t>
-            </a:r>
+              <a:t>is not allowed! This includes for writing the code for the STV project.</a:t>
+            </a:r>
+          </a:p>
+          <a:p>
             <a:r>
               <a:rPr lang="en-US" sz="2400" dirty="0"/>
-              <a:t> for </a:t>
-            </a:r>
-            <a:r>
-              <a:rPr lang="en-US" sz="2400" dirty="0" err="1"/>
-              <a:t>homeworks</a:t>
-            </a:r>
-            <a:r>
+              <a:t>Exception: you can use them to help you writing tests. Keep in mind that you are have the end responsibility, so do check what AI recommends you.</a:t>
+            </a:r>
+            <a:br>
               <a:rPr lang="en-US" sz="2400" dirty="0"/>
-              <a:t> and proof assignments are </a:t>
-            </a:r>
-            <a:r>
-              <a:rPr lang="en-US" sz="2400" b="1" dirty="0">
-                <a:highlight>
-                  <a:srgbClr val="FFFF00"/>
-                </a:highlight>
-              </a:rPr>
-              <a:t>not allowed </a:t>
-            </a:r>
-            <a:r>
+            </a:br>
+            <a:br>
               <a:rPr lang="en-US" sz="2400" dirty="0"/>
-              <a:t>(count as cheating).</a:t>
-            </a:r>
-          </a:p>
-          <a:p>
+            </a:br>
             <a:r>
               <a:rPr lang="en-US" sz="2400" dirty="0"/>
-              <a:t>Using </a:t>
-            </a:r>
-            <a:r>
-              <a:rPr lang="en-US" sz="2400" dirty="0" err="1"/>
-              <a:t>CoPilot</a:t>
-            </a:r>
-            <a:r>
-              <a:rPr lang="en-US" sz="2400" dirty="0"/>
-              <a:t> for your testing project is allowed (we just see it as another test generator).</a:t>
-            </a:r>
-          </a:p>
-          <a:p>
-            <a:pPr lvl="1"/>
-            <a:r>
-              <a:rPr lang="en-US" sz="2400" dirty="0"/>
-              <a:t>Do not blindly trust </a:t>
-            </a:r>
-            <a:r>
-              <a:rPr lang="en-US" sz="2400" dirty="0" err="1"/>
-              <a:t>CoPilot</a:t>
-            </a:r>
-            <a:r>
-              <a:rPr lang="en-US" sz="2400" dirty="0"/>
-              <a:t> !</a:t>
-            </a:r>
-          </a:p>
-          <a:p>
-            <a:pPr lvl="1"/>
-            <a:r>
-              <a:rPr lang="en-US" sz="2400" dirty="0"/>
-              <a:t>You have the end-responsibility (you can’t blame </a:t>
-            </a:r>
-            <a:r>
-              <a:rPr lang="en-US" sz="2400" dirty="0" err="1"/>
-              <a:t>CoPilot</a:t>
-            </a:r>
-            <a:r>
-              <a:rPr lang="en-US" sz="2400" dirty="0"/>
-              <a:t> if your solution doesn’t work).</a:t>
-            </a:r>
-          </a:p>
-          <a:p>
-            <a:pPr lvl="1"/>
-            <a:endParaRPr lang="en-US" sz="2400" dirty="0"/>
+              <a:t>Your Rider IDE has support for copilot AI. </a:t>
+            </a:r>
           </a:p>
           <a:p>
             <a:pPr lvl="1"/>
@@ -5778,7 +5721,7 @@
           <a:p>
             <a:r>
               <a:rPr lang="en-US" sz="2400" dirty="0"/>
-              <a:t>Use </a:t>
+              <a:t>You can use </a:t>
             </a:r>
             <a:r>
               <a:rPr lang="en-US" sz="2400" dirty="0" err="1"/>
@@ -5786,7 +5729,15 @@
             </a:r>
             <a:r>
               <a:rPr lang="en-US" sz="2400" dirty="0"/>
-              <a:t> to host your project. </a:t>
+              <a:t> or </a:t>
+            </a:r>
+            <a:r>
+              <a:rPr lang="en-US" sz="2400" dirty="0" err="1"/>
+              <a:t>uu</a:t>
+            </a:r>
+            <a:r>
+              <a:rPr lang="en-US" sz="2400" dirty="0"/>
+              <a:t>-Gitlab to host your project. </a:t>
             </a:r>
             <a:r>
               <a:rPr lang="en-US" sz="2400" dirty="0">
@@ -6093,15 +6044,51 @@
           </a:p>
           <a:p>
             <a:r>
+              <a:rPr lang="en-NL" sz="2400" dirty="0">
+                <a:highlight>
+                  <a:srgbClr val="FFFF00"/>
+                </a:highlight>
+              </a:rPr>
+              <a:t>Brightspace</a:t>
+            </a:r>
+            <a:r>
               <a:rPr lang="en-NL" sz="2400" dirty="0"/>
-              <a:t>MS-Team B3STV, for:</a:t>
+              <a:t>, for</a:t>
             </a:r>
           </a:p>
           <a:p>
             <a:pPr lvl="1"/>
             <a:r>
               <a:rPr lang="en-NL" sz="2400" b="1" dirty="0"/>
-              <a:t>Submitting Testing-homeworks and Proof-assignments.</a:t>
+              <a:t>Testing Quizzes</a:t>
+            </a:r>
+          </a:p>
+          <a:p>
+            <a:pPr lvl="1"/>
+            <a:r>
+              <a:rPr lang="en-NL" sz="2400" b="1" dirty="0"/>
+              <a:t>Submitting project</a:t>
+            </a:r>
+          </a:p>
+          <a:p>
+            <a:r>
+              <a:rPr lang="en-NL" sz="2400" dirty="0">
+                <a:highlight>
+                  <a:srgbClr val="FFFF00"/>
+                </a:highlight>
+              </a:rPr>
+              <a:t>MS-Team B3STV</a:t>
+            </a:r>
+            <a:r>
+              <a:rPr lang="en-NL" sz="2400" dirty="0"/>
+              <a:t>, for:</a:t>
+            </a:r>
+          </a:p>
+          <a:p>
+            <a:pPr lvl="1"/>
+            <a:r>
+              <a:rPr lang="en-NL" sz="2400" b="1" dirty="0"/>
+              <a:t>Submitting formalization-assignments and Proof-assignments.</a:t>
             </a:r>
           </a:p>
           <a:p>
@@ -6114,7 +6101,7 @@
           <a:p>
             <a:r>
               <a:rPr lang="en-NL" sz="2400" dirty="0"/>
-              <a:t>Lectures and werkcolleges are physical (on-site) every Monday and Thursday. You have the T</a:t>
+              <a:t>Lectures and werkcolleges are physical (on-site) every Tuesday and Thursday. You have the T</a:t>
             </a:r>
             <a:r>
               <a:rPr lang="en-GB" sz="2400" dirty="0"/>
@@ -6226,7 +6213,7 @@
           <a:p>
             <a:r>
               <a:rPr lang="en-US" dirty="0"/>
-              <a:t>Crew</a:t>
+              <a:t>Team</a:t>
             </a:r>
           </a:p>
         </p:txBody>
@@ -6274,17 +6261,17 @@
           <a:p>
             <a:r>
               <a:rPr lang="en-US" sz="2800" dirty="0"/>
-              <a:t>Gabriele Keller (lectures)</a:t>
+              <a:t>Paige North (lectures)</a:t>
             </a:r>
           </a:p>
           <a:p>
             <a:r>
               <a:rPr lang="en-US" sz="2800" dirty="0"/>
-              <a:t>Quincy </a:t>
+              <a:t>Lana </a:t>
             </a:r>
             <a:r>
               <a:rPr lang="en-US" sz="2800" dirty="0" err="1"/>
-              <a:t>Einmahl</a:t>
+              <a:t>Idema</a:t>
             </a:r>
             <a:r>
               <a:rPr lang="en-US" sz="2800" dirty="0"/>
@@ -6297,12 +6284,8 @@
           </a:p>
           <a:p>
             <a:r>
-              <a:rPr lang="en-GB" sz="2800" dirty="0" err="1"/>
-              <a:t>Charl</a:t>
-            </a:r>
-            <a:r>
               <a:rPr lang="en-GB" sz="2800" dirty="0"/>
-              <a:t>-Pierre Marais </a:t>
+              <a:t>Justin Timmer </a:t>
             </a:r>
             <a:r>
               <a:rPr lang="en-NL" sz="2800" dirty="0"/>
@@ -6313,20 +6296,13 @@
           <a:p>
             <a:r>
               <a:rPr lang="en-NL" sz="2800" dirty="0"/>
-              <a:t>Ben Stokmans (TA, werkcollege)</a:t>
-            </a:r>
-          </a:p>
-          <a:p>
-            <a:r>
-              <a:rPr lang="en-GB" sz="2800" dirty="0"/>
-              <a:t>Mitchel Zhu </a:t>
-            </a:r>
-            <a:r>
-              <a:rPr lang="en-NL" sz="2800" dirty="0"/>
-              <a:t>(TA, werkcollege)</a:t>
-            </a:r>
-          </a:p>
-          <a:p>
+              <a:t>Tammo Steffens (TA, werkcollege)</a:t>
+            </a:r>
+          </a:p>
+          <a:p>
+            <a:pPr marL="0" indent="0">
+              <a:buNone/>
+            </a:pPr>
             <a:endParaRPr lang="en-NL" sz="2800" dirty="0"/>
           </a:p>
         </p:txBody>
@@ -6509,7 +6485,7 @@
             </a:pPr>
             <a:r>
               <a:rPr lang="en-US" sz="2800" dirty="0"/>
-              <a:t>Because poor quality, including software bugs, may have severe consequences</a:t>
+              <a:t>Because poor quality, including software bugs, may have real consequences</a:t>
             </a:r>
           </a:p>
           <a:p>
@@ -8215,24 +8191,53 @@
           <a:lstStyle/>
           <a:p>
             <a:r>
-              <a:rPr lang="en-US" sz="2800" dirty="0"/>
+              <a:rPr lang="en-US" sz="2400" dirty="0"/>
               <a:t> Project management aspects of quality assurance (QA) in a large project </a:t>
             </a:r>
-            <a:r>
-              <a:rPr lang="en-US" sz="2800" dirty="0">
+            <a:endParaRPr lang="en-US" sz="2400" dirty="0">
+              <a:sym typeface="Wingdings"/>
+            </a:endParaRPr>
+          </a:p>
+          <a:p>
+            <a:pPr lvl="1"/>
+            <a:r>
+              <a:rPr lang="en-US" sz="2000" dirty="0">
                 <a:sym typeface="Wingdings"/>
               </a:rPr>
-              <a:t> covered in Software Project (bachelor).</a:t>
-            </a:r>
-          </a:p>
-          <a:p>
-            <a:r>
-              <a:rPr lang="en-US" sz="2800" dirty="0">
+              <a:t>covered in Software Project (bachelor).</a:t>
+            </a:r>
+          </a:p>
+          <a:p>
+            <a:endParaRPr lang="en-US" sz="2400" dirty="0">
+              <a:sym typeface="Wingdings"/>
+            </a:endParaRPr>
+          </a:p>
+          <a:p>
+            <a:r>
+              <a:rPr lang="en-US" sz="2400" dirty="0">
                 <a:sym typeface="Wingdings"/>
               </a:rPr>
-              <a:t>Automated verification algorithms  covered in the Program Semantic &amp; Verification course (master).</a:t>
-            </a:r>
-            <a:endParaRPr lang="en-US" sz="2800" dirty="0"/>
+              <a:t>Automated verification algorithms </a:t>
+            </a:r>
+          </a:p>
+          <a:p>
+            <a:pPr lvl="1"/>
+            <a:r>
+              <a:rPr lang="en-US" sz="2000" dirty="0">
+                <a:sym typeface="Wingdings"/>
+              </a:rPr>
+              <a:t>covered in the Program Semantic &amp; Verification course (master).</a:t>
+            </a:r>
+          </a:p>
+          <a:p>
+            <a:pPr lvl="1"/>
+            <a:r>
+              <a:rPr lang="en-US" sz="2000" dirty="0">
+                <a:sym typeface="Wingdings"/>
+              </a:rPr>
+              <a:t>see also the “materials”-tab in the website: automated testing, theorem provers, proof assistants, CBMC (bounded model checker for C/C++).</a:t>
+            </a:r>
+            <a:endParaRPr lang="en-US" sz="2000" dirty="0"/>
           </a:p>
         </p:txBody>
       </p:sp>
@@ -8334,7 +8339,12 @@
             <p:ph idx="1"/>
           </p:nvPr>
         </p:nvSpPr>
-        <p:spPr/>
+        <p:spPr>
+          <a:xfrm>
+            <a:off x="457200" y="1600200"/>
+            <a:ext cx="8435280" cy="4525963"/>
+          </a:xfrm>
+        </p:spPr>
         <p:txBody>
           <a:bodyPr/>
           <a:lstStyle/>
@@ -8458,7 +8468,7 @@
           <a:p>
             <a:r>
               <a:rPr lang="en-US" dirty="0"/>
-              <a:t>Site &amp; Materials</a:t>
+              <a:t>Sites &amp; Materials</a:t>
             </a:r>
           </a:p>
         </p:txBody>
@@ -8475,8 +8485,8 @@
         </p:nvSpPr>
         <p:spPr>
           <a:xfrm>
-            <a:off x="457200" y="2060848"/>
-            <a:ext cx="8229600" cy="4065315"/>
+            <a:off x="457200" y="1417638"/>
+            <a:ext cx="8507288" cy="4708525"/>
           </a:xfrm>
         </p:spPr>
         <p:txBody>
@@ -8484,26 +8494,53 @@
           <a:lstStyle/>
           <a:p>
             <a:r>
+              <a:rPr lang="en-US" sz="2400" dirty="0">
+                <a:highlight>
+                  <a:srgbClr val="FFFF00"/>
+                </a:highlight>
+              </a:rPr>
+              <a:t>Website</a:t>
+            </a:r>
+            <a:r>
+              <a:rPr lang="en-US" sz="2400" dirty="0"/>
+              <a:t> is for now hosted in </a:t>
+            </a:r>
+            <a:r>
               <a:rPr lang="en-US" sz="2400" dirty="0" err="1"/>
-              <a:t>ics.uu.nl</a:t>
+              <a:t>github</a:t>
             </a:r>
             <a:r>
               <a:rPr lang="en-US" sz="2400" dirty="0"/>
-              <a:t>/docs/</a:t>
-            </a:r>
-            <a:r>
-              <a:rPr lang="en-US" sz="2400" dirty="0" err="1"/>
-              <a:t>vakken</a:t>
-            </a:r>
-            <a:r>
+              <a:t>:</a:t>
+            </a:r>
+            <a:br>
               <a:rPr lang="en-US" sz="2400" dirty="0"/>
-              <a:t>/b3stv</a:t>
-            </a:r>
-          </a:p>
-          <a:p>
+            </a:br>
+            <a:r>
+              <a:rPr lang="en-US" sz="2400" dirty="0">
+                <a:hlinkClick r:id="rId2"/>
+              </a:rPr>
+              <a:t>https://wooshrow.github.io/b3stv/</a:t>
+            </a:r>
+            <a:br>
+              <a:rPr lang="en-US" sz="2400" dirty="0"/>
+            </a:br>
+            <a:r>
+              <a:rPr lang="en-US" sz="2400" dirty="0">
+                <a:hlinkClick r:id="rId3"/>
+              </a:rPr>
+              <a:t>https://github.com/wooshrow/b3stv</a:t>
+            </a:r>
             <a:endParaRPr lang="en-US" sz="2400" dirty="0"/>
           </a:p>
           <a:p>
+            <a:r>
+              <a:rPr lang="en-US" sz="2400" dirty="0"/>
+              <a:t>Books:</a:t>
+            </a:r>
+          </a:p>
+          <a:p>
+            <a:pPr lvl="1"/>
             <a:r>
               <a:rPr lang="en-US" sz="2400" dirty="0"/>
               <a:t>Paul Ammann and Jeff Offutt, Introduction to Software Testing, </a:t>
@@ -8542,9 +8579,7 @@
             </a:r>
           </a:p>
           <a:p>
-            <a:endParaRPr lang="en-US" sz="2400" dirty="0"/>
-          </a:p>
-          <a:p>
+            <a:pPr lvl="1"/>
             <a:r>
               <a:rPr lang="en-US" sz="2400" dirty="0"/>
               <a:t>Lecture Notes (can be obtained from the website), for the program verification part.</a:t>

--- a/slides/organization.pptx
+++ b/slides/organization.pptx
@@ -5,7 +5,7 @@
     <p:sldMasterId id="2147483696" r:id="rId1"/>
   </p:sldMasterIdLst>
   <p:notesMasterIdLst>
-    <p:notesMasterId r:id="rId18"/>
+    <p:notesMasterId r:id="rId19"/>
   </p:notesMasterIdLst>
   <p:sldIdLst>
     <p:sldId id="256" r:id="rId2"/>
@@ -20,10 +20,11 @@
     <p:sldId id="259" r:id="rId11"/>
     <p:sldId id="299" r:id="rId12"/>
     <p:sldId id="301" r:id="rId13"/>
-    <p:sldId id="267" r:id="rId14"/>
-    <p:sldId id="296" r:id="rId15"/>
-    <p:sldId id="300" r:id="rId16"/>
-    <p:sldId id="266" r:id="rId17"/>
+    <p:sldId id="302" r:id="rId14"/>
+    <p:sldId id="267" r:id="rId15"/>
+    <p:sldId id="296" r:id="rId16"/>
+    <p:sldId id="300" r:id="rId17"/>
+    <p:sldId id="266" r:id="rId18"/>
   </p:sldIdLst>
   <p:sldSz cx="9144000" cy="6858000" type="screen4x3"/>
   <p:notesSz cx="6858000" cy="9144000"/>
@@ -280,7 +281,7 @@
               <a:pPr>
                 <a:defRPr/>
               </a:pPr>
-              <a:t>10-04-2026</a:t>
+              <a:t>16-04-2026</a:t>
             </a:fld>
             <a:endParaRPr lang="en-US"/>
           </a:p>
@@ -1216,7 +1217,7 @@
               <a:pPr>
                 <a:defRPr/>
               </a:pPr>
-              <a:t>14</a:t>
+              <a:t>15</a:t>
             </a:fld>
             <a:endParaRPr lang="en-US"/>
           </a:p>
@@ -1306,7 +1307,7 @@
               <a:pPr>
                 <a:defRPr/>
               </a:pPr>
-              <a:t>15</a:t>
+              <a:t>16</a:t>
             </a:fld>
             <a:endParaRPr lang="en-US"/>
           </a:p>
@@ -1396,7 +1397,7 @@
               <a:pPr>
                 <a:defRPr/>
               </a:pPr>
-              <a:t>16</a:t>
+              <a:t>17</a:t>
             </a:fld>
             <a:endParaRPr lang="en-US"/>
           </a:p>
@@ -1610,7 +1611,7 @@
               <a:pPr>
                 <a:defRPr/>
               </a:pPr>
-              <a:t>10-04-2026</a:t>
+              <a:t>16-04-2026</a:t>
             </a:fld>
             <a:endParaRPr lang="en-US"/>
           </a:p>
@@ -1800,7 +1801,7 @@
               <a:pPr>
                 <a:defRPr/>
               </a:pPr>
-              <a:t>10-04-2026</a:t>
+              <a:t>16-04-2026</a:t>
             </a:fld>
             <a:endParaRPr lang="en-US"/>
           </a:p>
@@ -2000,7 +2001,7 @@
               <a:pPr>
                 <a:defRPr/>
               </a:pPr>
-              <a:t>10-04-2026</a:t>
+              <a:t>16-04-2026</a:t>
             </a:fld>
             <a:endParaRPr lang="en-US"/>
           </a:p>
@@ -2196,7 +2197,7 @@
               <a:pPr>
                 <a:defRPr/>
               </a:pPr>
-              <a:t>10-04-2026</a:t>
+              <a:t>16-04-2026</a:t>
             </a:fld>
             <a:endParaRPr lang="en-US"/>
           </a:p>
@@ -2463,7 +2464,7 @@
               <a:pPr>
                 <a:defRPr/>
               </a:pPr>
-              <a:t>10-04-2026</a:t>
+              <a:t>16-04-2026</a:t>
             </a:fld>
             <a:endParaRPr lang="en-US"/>
           </a:p>
@@ -2770,7 +2771,7 @@
               <a:pPr>
                 <a:defRPr/>
               </a:pPr>
-              <a:t>10-04-2026</a:t>
+              <a:t>16-04-2026</a:t>
             </a:fld>
             <a:endParaRPr lang="en-US"/>
           </a:p>
@@ -3211,7 +3212,7 @@
               <a:pPr>
                 <a:defRPr/>
               </a:pPr>
-              <a:t>10-04-2026</a:t>
+              <a:t>16-04-2026</a:t>
             </a:fld>
             <a:endParaRPr lang="en-US"/>
           </a:p>
@@ -3350,7 +3351,7 @@
               <a:pPr>
                 <a:defRPr/>
               </a:pPr>
-              <a:t>10-04-2026</a:t>
+              <a:t>16-04-2026</a:t>
             </a:fld>
             <a:endParaRPr lang="en-US"/>
           </a:p>
@@ -3467,7 +3468,7 @@
               <a:pPr>
                 <a:defRPr/>
               </a:pPr>
-              <a:t>10-04-2026</a:t>
+              <a:t>16-04-2026</a:t>
             </a:fld>
             <a:endParaRPr lang="en-US"/>
           </a:p>
@@ -3764,7 +3765,7 @@
               <a:pPr>
                 <a:defRPr/>
               </a:pPr>
-              <a:t>10-04-2026</a:t>
+              <a:t>16-04-2026</a:t>
             </a:fld>
             <a:endParaRPr lang="en-US"/>
           </a:p>
@@ -4041,7 +4042,7 @@
               <a:pPr>
                 <a:defRPr/>
               </a:pPr>
-              <a:t>10-04-2026</a:t>
+              <a:t>16-04-2026</a:t>
             </a:fld>
             <a:endParaRPr lang="en-US"/>
           </a:p>
@@ -4297,7 +4298,7 @@
               <a:pPr>
                 <a:defRPr/>
               </a:pPr>
-              <a:t>10-04-2026</a:t>
+              <a:t>16-04-2026</a:t>
             </a:fld>
             <a:endParaRPr lang="en-US"/>
           </a:p>
@@ -5548,14 +5549,22 @@
           <a:lstStyle/>
           <a:p>
             <a:r>
+              <a:rPr lang="en-US" sz="2400" dirty="0">
+                <a:highlight>
+                  <a:srgbClr val="FFFF00"/>
+                </a:highlight>
+              </a:rPr>
+              <a:t>is NOT allowed</a:t>
+            </a:r>
+            <a:r>
               <a:rPr lang="en-US" sz="2400" dirty="0"/>
-              <a:t>is not allowed! This includes for writing the code for the STV project.</a:t>
+              <a:t>! This includes for writing the code for the STV project.</a:t>
             </a:r>
           </a:p>
           <a:p>
             <a:r>
               <a:rPr lang="en-US" sz="2400" dirty="0"/>
-              <a:t>Exception: you can use them to help you writing tests. Keep in mind that you are have the end responsibility, so do check what AI recommends you.</a:t>
+              <a:t>Exception: you can use them to help you writing tests. Keep in mind that you own the end responsibility, so do check what AI recommends you.</a:t>
             </a:r>
             <a:br>
               <a:rPr lang="en-US" sz="2400" dirty="0"/>
@@ -5567,6 +5576,27 @@
               <a:rPr lang="en-US" sz="2400" dirty="0"/>
               <a:t>Your Rider IDE has support for copilot AI. </a:t>
             </a:r>
+            <a:br>
+              <a:rPr lang="en-US" sz="2400" dirty="0"/>
+            </a:br>
+            <a:br>
+              <a:rPr lang="en-US" sz="2400" dirty="0"/>
+            </a:br>
+            <a:r>
+              <a:rPr lang="en-US" sz="2400" dirty="0">
+                <a:highlight>
+                  <a:srgbClr val="FFFF00"/>
+                </a:highlight>
+              </a:rPr>
+              <a:t>Mark the code that is generated by AI</a:t>
+            </a:r>
+            <a:r>
+              <a:rPr lang="en-US" sz="2400" dirty="0"/>
+              <a:t>. And specifically add a statement that you have checked the generated code yourself (next slide).</a:t>
+            </a:r>
+          </a:p>
+          <a:p>
+            <a:endParaRPr lang="en-US" sz="2400" dirty="0"/>
           </a:p>
           <a:p>
             <a:pPr lvl="1"/>
@@ -5635,7 +5665,13 @@
       </p:grpSpPr>
       <p:sp>
         <p:nvSpPr>
-          <p:cNvPr id="2" name="Title 1"/>
+          <p:cNvPr id="2" name="Title 1">
+            <a:extLst>
+              <a:ext uri="{FF2B5EF4-FFF2-40B4-BE49-F238E27FC236}">
+                <a16:creationId xmlns:a16="http://schemas.microsoft.com/office/drawing/2014/main" id="{DD776147-9983-C781-3563-F7EE6676A4F4}"/>
+              </a:ext>
+            </a:extLst>
+          </p:cNvPr>
           <p:cNvSpPr>
             <a:spLocks noGrp="1"/>
           </p:cNvSpPr>
@@ -5649,15 +5685,21 @@
           <a:lstStyle/>
           <a:p>
             <a:r>
-              <a:rPr lang="en-US" dirty="0"/>
-              <a:t>Software</a:t>
-            </a:r>
-          </a:p>
-        </p:txBody>
-      </p:sp>
-      <p:sp>
-        <p:nvSpPr>
-          <p:cNvPr id="3" name="Content Placeholder 2"/>
+              <a:rPr lang="en-NL" sz="3600" dirty="0"/>
+              <a:t>Mark and inspect your AI-generated code</a:t>
+            </a:r>
+          </a:p>
+        </p:txBody>
+      </p:sp>
+      <p:sp>
+        <p:nvSpPr>
+          <p:cNvPr id="3" name="Content Placeholder 2">
+            <a:extLst>
+              <a:ext uri="{FF2B5EF4-FFF2-40B4-BE49-F238E27FC236}">
+                <a16:creationId xmlns:a16="http://schemas.microsoft.com/office/drawing/2014/main" id="{020478D3-FEDA-F16E-EB46-9B53D5B32EF5}"/>
+              </a:ext>
+            </a:extLst>
+          </p:cNvPr>
           <p:cNvSpPr>
             <a:spLocks noGrp="1"/>
           </p:cNvSpPr>
@@ -5667,102 +5709,142 @@
         </p:nvSpPr>
         <p:spPr>
           <a:xfrm>
-            <a:off x="457200" y="1988840"/>
-            <a:ext cx="8229600" cy="4137323"/>
+            <a:off x="1403648" y="1615351"/>
+            <a:ext cx="6336704" cy="2605737"/>
           </a:xfrm>
         </p:spPr>
         <p:txBody>
           <a:bodyPr/>
           <a:lstStyle/>
           <a:p>
-            <a:r>
-              <a:rPr lang="en-US" sz="2400" dirty="0" err="1"/>
-              <a:t>Jetbrains</a:t>
-            </a:r>
-            <a:r>
-              <a:rPr lang="en-US" sz="2400" dirty="0"/>
-              <a:t> </a:t>
-            </a:r>
-            <a:r>
-              <a:rPr lang="en-US" sz="2400" dirty="0">
+            <a:pPr marL="0" indent="0">
+              <a:buNone/>
+            </a:pPr>
+            <a:r>
+              <a:rPr lang="en-NL" sz="1600" dirty="0">
+                <a:latin typeface="Courier New" panose="02070309020205020404" pitchFamily="49" charset="0"/>
+                <a:cs typeface="Courier New" panose="02070309020205020404" pitchFamily="49" charset="0"/>
+              </a:rPr>
+              <a:t>/// &lt;summary&gt;</a:t>
+            </a:r>
+          </a:p>
+          <a:p>
+            <a:pPr marL="0" indent="0">
+              <a:buNone/>
+            </a:pPr>
+            <a:r>
+              <a:rPr lang="en-NL" sz="1600" dirty="0">
+                <a:latin typeface="Courier New" panose="02070309020205020404" pitchFamily="49" charset="0"/>
+                <a:cs typeface="Courier New" panose="02070309020205020404" pitchFamily="49" charset="0"/>
+              </a:rPr>
+              <a:t>/// test that monsters have the correct initial hp</a:t>
+            </a:r>
+          </a:p>
+          <a:p>
+            <a:pPr marL="0" indent="0">
+              <a:buNone/>
+            </a:pPr>
+            <a:r>
+              <a:rPr lang="en-NL" sz="1600" dirty="0">
+                <a:latin typeface="Courier New" panose="02070309020205020404" pitchFamily="49" charset="0"/>
+                <a:cs typeface="Courier New" panose="02070309020205020404" pitchFamily="49" charset="0"/>
+              </a:rPr>
+              <a:t>/// &lt;/summary&gt;</a:t>
+            </a:r>
+          </a:p>
+          <a:p>
+            <a:pPr marL="0" indent="0">
+              <a:buNone/>
+            </a:pPr>
+            <a:r>
+              <a:rPr lang="en-NL" sz="1600" dirty="0">
                 <a:highlight>
                   <a:srgbClr val="FFFF00"/>
                 </a:highlight>
+                <a:latin typeface="Courier New" panose="02070309020205020404" pitchFamily="49" charset="0"/>
+                <a:cs typeface="Courier New" panose="02070309020205020404" pitchFamily="49" charset="0"/>
               </a:rPr>
-              <a:t>Raider IDE</a:t>
-            </a:r>
-            <a:r>
-              <a:rPr lang="en-US" sz="2400" dirty="0"/>
-              <a:t>, you can get free education license. Works on Windows and Mac, supposedly also on Linux.</a:t>
-            </a:r>
-          </a:p>
-          <a:p>
-            <a:r>
-              <a:rPr lang="en-US" sz="2400" dirty="0"/>
-              <a:t>Or Visual Studio </a:t>
-            </a:r>
-            <a:r>
-              <a:rPr lang="en-US" sz="2400" b="1" dirty="0">
-                <a:solidFill>
-                  <a:srgbClr val="C00000"/>
-                </a:solidFill>
-              </a:rPr>
-              <a:t>Enterprise </a:t>
-            </a:r>
-            <a:r>
-              <a:rPr lang="en-US" sz="2400" dirty="0"/>
-              <a:t>edition</a:t>
-            </a:r>
-            <a:r>
-              <a:rPr lang="en-US" sz="2400" b="1" dirty="0"/>
-              <a:t>. Not free.</a:t>
-            </a:r>
-          </a:p>
-          <a:p>
-            <a:r>
-              <a:rPr lang="en-US" sz="2400" dirty="0"/>
-              <a:t>You can use </a:t>
-            </a:r>
-            <a:r>
-              <a:rPr lang="en-US" sz="2400" dirty="0" err="1"/>
-              <a:t>Github</a:t>
-            </a:r>
-            <a:r>
-              <a:rPr lang="en-US" sz="2400" dirty="0"/>
-              <a:t> or </a:t>
-            </a:r>
-            <a:r>
-              <a:rPr lang="en-US" sz="2400" dirty="0" err="1"/>
-              <a:t>uu</a:t>
-            </a:r>
-            <a:r>
-              <a:rPr lang="en-US" sz="2400" dirty="0"/>
-              <a:t>-Gitlab to host your project. </a:t>
-            </a:r>
-            <a:r>
-              <a:rPr lang="en-US" sz="2400" dirty="0">
-                <a:solidFill>
-                  <a:srgbClr val="FF0000"/>
-                </a:solidFill>
-              </a:rPr>
-              <a:t>Please make your git-repository private! </a:t>
-            </a:r>
-            <a:br>
-              <a:rPr lang="en-US" sz="2400" dirty="0"/>
-            </a:br>
-            <a:endParaRPr lang="en-US" sz="2800" dirty="0"/>
+              <a:t>/// @ai-generated Inspected by: &lt;your github-id&gt;</a:t>
+            </a:r>
           </a:p>
           <a:p>
             <a:pPr marL="0" indent="0">
               <a:buNone/>
             </a:pPr>
-            <a:endParaRPr lang="en-US" sz="2400" dirty="0"/>
-          </a:p>
-        </p:txBody>
-      </p:sp>
-      <p:sp>
-        <p:nvSpPr>
-          <p:cNvPr id="4" name="Slide Number Placeholder 3"/>
+            <a:r>
+              <a:rPr lang="en-NL" sz="1600" dirty="0">
+                <a:latin typeface="Courier New" panose="02070309020205020404" pitchFamily="49" charset="0"/>
+                <a:cs typeface="Courier New" panose="02070309020205020404" pitchFamily="49" charset="0"/>
+              </a:rPr>
+              <a:t>monster_test_hp() {</a:t>
+            </a:r>
+            <a:br>
+              <a:rPr lang="en-NL" sz="1600" dirty="0">
+                <a:latin typeface="Courier New" panose="02070309020205020404" pitchFamily="49" charset="0"/>
+                <a:cs typeface="Courier New" panose="02070309020205020404" pitchFamily="49" charset="0"/>
+              </a:rPr>
+            </a:br>
+            <a:r>
+              <a:rPr lang="en-NL" sz="1600" dirty="0">
+                <a:latin typeface="Courier New" panose="02070309020205020404" pitchFamily="49" charset="0"/>
+                <a:cs typeface="Courier New" panose="02070309020205020404" pitchFamily="49" charset="0"/>
+              </a:rPr>
+              <a:t>   Monster m = new Monster(“id”) ;</a:t>
+            </a:r>
+            <a:br>
+              <a:rPr lang="en-NL" sz="1600" dirty="0">
+                <a:latin typeface="Courier New" panose="02070309020205020404" pitchFamily="49" charset="0"/>
+                <a:cs typeface="Courier New" panose="02070309020205020404" pitchFamily="49" charset="0"/>
+              </a:rPr>
+            </a:br>
+            <a:r>
+              <a:rPr lang="en-NL" sz="1600" dirty="0">
+                <a:latin typeface="Courier New" panose="02070309020205020404" pitchFamily="49" charset="0"/>
+                <a:cs typeface="Courier New" panose="02070309020205020404" pitchFamily="49" charset="0"/>
+              </a:rPr>
+              <a:t>   assertEqual(10, m.hp()) ;</a:t>
+            </a:r>
+            <a:br>
+              <a:rPr lang="en-NL" sz="1600" dirty="0">
+                <a:latin typeface="Courier New" panose="02070309020205020404" pitchFamily="49" charset="0"/>
+                <a:cs typeface="Courier New" panose="02070309020205020404" pitchFamily="49" charset="0"/>
+              </a:rPr>
+            </a:br>
+            <a:r>
+              <a:rPr lang="en-NL" sz="1600" dirty="0">
+                <a:latin typeface="Courier New" panose="02070309020205020404" pitchFamily="49" charset="0"/>
+                <a:cs typeface="Courier New" panose="02070309020205020404" pitchFamily="49" charset="0"/>
+              </a:rPr>
+              <a:t>}</a:t>
+            </a:r>
+            <a:br>
+              <a:rPr lang="en-NL" sz="1600" dirty="0">
+                <a:latin typeface="Courier New" panose="02070309020205020404" pitchFamily="49" charset="0"/>
+                <a:cs typeface="Courier New" panose="02070309020205020404" pitchFamily="49" charset="0"/>
+              </a:rPr>
+            </a:br>
+            <a:br>
+              <a:rPr lang="en-NL" sz="1600" dirty="0">
+                <a:latin typeface="Courier New" panose="02070309020205020404" pitchFamily="49" charset="0"/>
+                <a:cs typeface="Courier New" panose="02070309020205020404" pitchFamily="49" charset="0"/>
+              </a:rPr>
+            </a:br>
+            <a:endParaRPr lang="en-NL" sz="1600" dirty="0">
+              <a:latin typeface="Courier New" panose="02070309020205020404" pitchFamily="49" charset="0"/>
+              <a:cs typeface="Courier New" panose="02070309020205020404" pitchFamily="49" charset="0"/>
+            </a:endParaRPr>
+          </a:p>
+        </p:txBody>
+      </p:sp>
+      <p:sp>
+        <p:nvSpPr>
+          <p:cNvPr id="4" name="Slide Number Placeholder 3">
+            <a:extLst>
+              <a:ext uri="{FF2B5EF4-FFF2-40B4-BE49-F238E27FC236}">
+                <a16:creationId xmlns:a16="http://schemas.microsoft.com/office/drawing/2014/main" id="{7C0D495E-C131-7AF4-EC26-2FCA6C980048}"/>
+              </a:ext>
+            </a:extLst>
+          </p:cNvPr>
           <p:cNvSpPr>
             <a:spLocks noGrp="1"/>
           </p:cNvSpPr>
@@ -5789,10 +5871,45 @@
           </a:p>
         </p:txBody>
       </p:sp>
+      <p:sp>
+        <p:nvSpPr>
+          <p:cNvPr id="5" name="TextBox 4">
+            <a:extLst>
+              <a:ext uri="{FF2B5EF4-FFF2-40B4-BE49-F238E27FC236}">
+                <a16:creationId xmlns:a16="http://schemas.microsoft.com/office/drawing/2014/main" id="{5FA711FE-A8D5-AFB4-D8E4-9CC4E1B4B663}"/>
+              </a:ext>
+            </a:extLst>
+          </p:cNvPr>
+          <p:cNvSpPr txBox="1"/>
+          <p:nvPr/>
+        </p:nvSpPr>
+        <p:spPr>
+          <a:xfrm>
+            <a:off x="704411" y="4418801"/>
+            <a:ext cx="7951202" cy="646331"/>
+          </a:xfrm>
+          <a:prstGeom prst="rect">
+            <a:avLst/>
+          </a:prstGeom>
+          <a:noFill/>
+        </p:spPr>
+        <p:txBody>
+          <a:bodyPr wrap="square" rtlCol="0">
+            <a:spAutoFit/>
+          </a:bodyPr>
+          <a:lstStyle/>
+          <a:p>
+            <a:r>
+              <a:rPr lang="en-NL" dirty="0"/>
+              <a:t>Marking AI-generated content is part of good practice and is also demanded by AI transparency Law/s (e.g. the upcoming EU AI Act, 2026).</a:t>
+            </a:r>
+          </a:p>
+        </p:txBody>
+      </p:sp>
     </p:spTree>
     <p:extLst>
       <p:ext uri="{BB962C8B-B14F-4D97-AF65-F5344CB8AC3E}">
-        <p14:creationId xmlns:p14="http://schemas.microsoft.com/office/powerpoint/2010/main" val="1579527081"/>
+        <p14:creationId xmlns:p14="http://schemas.microsoft.com/office/powerpoint/2010/main" val="4052932049"/>
       </p:ext>
     </p:extLst>
   </p:cSld>
@@ -5821,13 +5938,7 @@
       </p:grpSpPr>
       <p:sp>
         <p:nvSpPr>
-          <p:cNvPr id="2" name="Title 1">
-            <a:extLst>
-              <a:ext uri="{FF2B5EF4-FFF2-40B4-BE49-F238E27FC236}">
-                <a16:creationId xmlns:a16="http://schemas.microsoft.com/office/drawing/2014/main" id="{3773F4C6-8D06-684B-B30C-2560B1AE507B}"/>
-              </a:ext>
-            </a:extLst>
-          </p:cNvPr>
+          <p:cNvPr id="2" name="Title 1"/>
           <p:cNvSpPr>
             <a:spLocks noGrp="1"/>
           </p:cNvSpPr>
@@ -5842,20 +5953,14 @@
           <a:p>
             <a:r>
               <a:rPr lang="en-US" dirty="0"/>
-              <a:t>Load</a:t>
-            </a:r>
-          </a:p>
-        </p:txBody>
-      </p:sp>
-      <p:sp>
-        <p:nvSpPr>
-          <p:cNvPr id="3" name="Content Placeholder 2">
-            <a:extLst>
-              <a:ext uri="{FF2B5EF4-FFF2-40B4-BE49-F238E27FC236}">
-                <a16:creationId xmlns:a16="http://schemas.microsoft.com/office/drawing/2014/main" id="{01C270F8-1FAA-4F49-827C-8320C9004E86}"/>
-              </a:ext>
-            </a:extLst>
-          </p:cNvPr>
+              <a:t>Software</a:t>
+            </a:r>
+          </a:p>
+        </p:txBody>
+      </p:sp>
+      <p:sp>
+        <p:nvSpPr>
+          <p:cNvPr id="3" name="Content Placeholder 2"/>
           <p:cNvSpPr>
             <a:spLocks noGrp="1"/>
           </p:cNvSpPr>
@@ -5863,70 +5968,104 @@
             <p:ph idx="1"/>
           </p:nvPr>
         </p:nvSpPr>
-        <p:spPr/>
+        <p:spPr>
+          <a:xfrm>
+            <a:off x="457200" y="1988840"/>
+            <a:ext cx="8229600" cy="4137323"/>
+          </a:xfrm>
+        </p:spPr>
         <p:txBody>
           <a:bodyPr/>
           <a:lstStyle/>
           <a:p>
             <a:r>
-              <a:rPr lang="en-US" dirty="0"/>
-              <a:t>We have a pretty dense </a:t>
-            </a:r>
-            <a:r>
-              <a:rPr lang="en-US" dirty="0" err="1"/>
-              <a:t>programme</a:t>
-            </a:r>
-            <a:r>
-              <a:rPr lang="en-US" dirty="0"/>
-              <a:t>. Expect to commit at least 16hrs/week.</a:t>
-            </a:r>
-          </a:p>
-          <a:p>
-            <a:r>
-              <a:rPr lang="en-US" dirty="0"/>
-              <a:t>Suggested plan:</a:t>
-            </a:r>
-          </a:p>
-          <a:p>
-            <a:pPr lvl="1"/>
-            <a:r>
-              <a:rPr lang="en-US" dirty="0"/>
-              <a:t>Lectures + lab/</a:t>
-            </a:r>
-            <a:r>
-              <a:rPr lang="en-US" dirty="0" err="1"/>
-              <a:t>wekcollege</a:t>
-            </a:r>
-            <a:r>
-              <a:rPr lang="en-US" dirty="0"/>
-              <a:t> sessions: 8h/w</a:t>
-            </a:r>
-          </a:p>
-          <a:p>
-            <a:pPr lvl="1"/>
-            <a:r>
-              <a:rPr lang="en-US" dirty="0"/>
-              <a:t>Self-study the theory: 4h/w</a:t>
-            </a:r>
-          </a:p>
-          <a:p>
-            <a:pPr lvl="1"/>
-            <a:r>
-              <a:rPr lang="en-US" dirty="0"/>
-              <a:t>Sprints for your Testing Project: 4h/w</a:t>
-            </a:r>
-          </a:p>
-        </p:txBody>
-      </p:sp>
-      <p:sp>
-        <p:nvSpPr>
-          <p:cNvPr id="4" name="Slide Number Placeholder 3">
-            <a:extLst>
-              <a:ext uri="{FF2B5EF4-FFF2-40B4-BE49-F238E27FC236}">
-                <a16:creationId xmlns:a16="http://schemas.microsoft.com/office/drawing/2014/main" id="{8C444C70-B676-444A-978B-E644F2ACD0CB}"/>
-              </a:ext>
-            </a:extLst>
-          </p:cNvPr>
+              <a:rPr lang="en-US" sz="2400" dirty="0" err="1"/>
+              <a:t>Jetbrains</a:t>
+            </a:r>
+            <a:r>
+              <a:rPr lang="en-US" sz="2400" dirty="0"/>
+              <a:t> </a:t>
+            </a:r>
+            <a:r>
+              <a:rPr lang="en-US" sz="2400" dirty="0">
+                <a:highlight>
+                  <a:srgbClr val="FFFF00"/>
+                </a:highlight>
+              </a:rPr>
+              <a:t>Raider IDE</a:t>
+            </a:r>
+            <a:r>
+              <a:rPr lang="en-US" sz="2400" dirty="0"/>
+              <a:t>, you can get free education license. Works on Windows and Mac, supposedly also on Linux.</a:t>
+            </a:r>
+          </a:p>
+          <a:p>
+            <a:r>
+              <a:rPr lang="en-US" sz="2400" dirty="0"/>
+              <a:t>Or Visual Studio </a:t>
+            </a:r>
+            <a:r>
+              <a:rPr lang="en-US" sz="2400" b="1" dirty="0">
+                <a:solidFill>
+                  <a:srgbClr val="C00000"/>
+                </a:solidFill>
+              </a:rPr>
+              <a:t>Enterprise </a:t>
+            </a:r>
+            <a:r>
+              <a:rPr lang="en-US" sz="2400" dirty="0"/>
+              <a:t>edition</a:t>
+            </a:r>
+            <a:r>
+              <a:rPr lang="en-US" sz="2400" b="1" dirty="0"/>
+              <a:t>. Not free.</a:t>
+            </a:r>
+          </a:p>
+          <a:p>
+            <a:r>
+              <a:rPr lang="en-US" sz="2400" dirty="0"/>
+              <a:t>You can use </a:t>
+            </a:r>
+            <a:r>
+              <a:rPr lang="en-US" sz="2400" dirty="0" err="1"/>
+              <a:t>Github</a:t>
+            </a:r>
+            <a:r>
+              <a:rPr lang="en-US" sz="2400" dirty="0"/>
+              <a:t> or </a:t>
+            </a:r>
+            <a:r>
+              <a:rPr lang="en-US" sz="2400" dirty="0" err="1"/>
+              <a:t>uu</a:t>
+            </a:r>
+            <a:r>
+              <a:rPr lang="en-US" sz="2400" dirty="0"/>
+              <a:t>-Gitlab to host your project. </a:t>
+            </a:r>
+            <a:r>
+              <a:rPr lang="en-US" sz="2400" dirty="0">
+                <a:solidFill>
+                  <a:srgbClr val="FF0000"/>
+                </a:solidFill>
+              </a:rPr>
+              <a:t>Please make your git-repository private! </a:t>
+            </a:r>
+            <a:br>
+              <a:rPr lang="en-US" sz="2400" dirty="0"/>
+            </a:br>
+            <a:endParaRPr lang="en-US" sz="2800" dirty="0"/>
+          </a:p>
+          <a:p>
+            <a:pPr marL="0" indent="0">
+              <a:buNone/>
+            </a:pPr>
+            <a:endParaRPr lang="en-US" sz="2400" dirty="0"/>
+          </a:p>
+        </p:txBody>
+      </p:sp>
+      <p:sp>
+        <p:nvSpPr>
+          <p:cNvPr id="4" name="Slide Number Placeholder 3"/>
           <p:cNvSpPr>
             <a:spLocks noGrp="1"/>
           </p:cNvSpPr>
@@ -5956,7 +6095,7 @@
     </p:spTree>
     <p:extLst>
       <p:ext uri="{BB962C8B-B14F-4D97-AF65-F5344CB8AC3E}">
-        <p14:creationId xmlns:p14="http://schemas.microsoft.com/office/powerpoint/2010/main" val="1433847495"/>
+        <p14:creationId xmlns:p14="http://schemas.microsoft.com/office/powerpoint/2010/main" val="1579527081"/>
       </p:ext>
     </p:extLst>
   </p:cSld>
@@ -5988,7 +6127,7 @@
           <p:cNvPr id="2" name="Title 1">
             <a:extLst>
               <a:ext uri="{FF2B5EF4-FFF2-40B4-BE49-F238E27FC236}">
-                <a16:creationId xmlns:a16="http://schemas.microsoft.com/office/drawing/2014/main" id="{3A7A6B41-D037-DE47-8E85-FD7D7533DF73}"/>
+                <a16:creationId xmlns:a16="http://schemas.microsoft.com/office/drawing/2014/main" id="{3773F4C6-8D06-684B-B30C-2560B1AE507B}"/>
               </a:ext>
             </a:extLst>
           </p:cNvPr>
@@ -6005,8 +6144,8 @@
           <a:lstStyle/>
           <a:p>
             <a:r>
-              <a:rPr lang="en-NL" dirty="0"/>
-              <a:t>Running the course</a:t>
+              <a:rPr lang="en-US" dirty="0"/>
+              <a:t>Load</a:t>
             </a:r>
           </a:p>
         </p:txBody>
@@ -6016,7 +6155,7 @@
           <p:cNvPr id="3" name="Content Placeholder 2">
             <a:extLst>
               <a:ext uri="{FF2B5EF4-FFF2-40B4-BE49-F238E27FC236}">
-                <a16:creationId xmlns:a16="http://schemas.microsoft.com/office/drawing/2014/main" id="{DB81BAEC-2F76-454F-968B-EFB6E72FC187}"/>
+                <a16:creationId xmlns:a16="http://schemas.microsoft.com/office/drawing/2014/main" id="{01C270F8-1FAA-4F49-827C-8320C9004E86}"/>
               </a:ext>
             </a:extLst>
           </p:cNvPr>
@@ -6027,107 +6166,58 @@
             <p:ph idx="1"/>
           </p:nvPr>
         </p:nvSpPr>
-        <p:spPr>
-          <a:xfrm>
-            <a:off x="251520" y="1600200"/>
-            <a:ext cx="8568952" cy="4525963"/>
-          </a:xfrm>
-        </p:spPr>
+        <p:spPr/>
         <p:txBody>
           <a:bodyPr/>
           <a:lstStyle/>
           <a:p>
             <a:r>
-              <a:rPr lang="en-NL" sz="2400" dirty="0"/>
-              <a:t>Overall week-to-week plan: see website</a:t>
-            </a:r>
-          </a:p>
-          <a:p>
-            <a:r>
-              <a:rPr lang="en-NL" sz="2400" dirty="0">
-                <a:highlight>
-                  <a:srgbClr val="FFFF00"/>
-                </a:highlight>
-              </a:rPr>
-              <a:t>Brightspace</a:t>
-            </a:r>
-            <a:r>
-              <a:rPr lang="en-NL" sz="2400" dirty="0"/>
-              <a:t>, for</a:t>
+              <a:rPr lang="en-US" dirty="0"/>
+              <a:t>We have a pretty dense </a:t>
+            </a:r>
+            <a:r>
+              <a:rPr lang="en-US" dirty="0" err="1"/>
+              <a:t>programme</a:t>
+            </a:r>
+            <a:r>
+              <a:rPr lang="en-US" dirty="0"/>
+              <a:t>. Expect to commit at least 16hrs/week.</a:t>
+            </a:r>
+          </a:p>
+          <a:p>
+            <a:r>
+              <a:rPr lang="en-US" dirty="0"/>
+              <a:t>Suggested plan:</a:t>
             </a:r>
           </a:p>
           <a:p>
             <a:pPr lvl="1"/>
             <a:r>
-              <a:rPr lang="en-NL" sz="2400" b="1" dirty="0"/>
-              <a:t>Testing Quizzes</a:t>
+              <a:rPr lang="en-US" dirty="0"/>
+              <a:t>Lectures + lab/</a:t>
+            </a:r>
+            <a:r>
+              <a:rPr lang="en-US" dirty="0" err="1"/>
+              <a:t>wekcollege</a:t>
+            </a:r>
+            <a:r>
+              <a:rPr lang="en-US" dirty="0"/>
+              <a:t> sessions: 8h/w</a:t>
             </a:r>
           </a:p>
           <a:p>
             <a:pPr lvl="1"/>
             <a:r>
-              <a:rPr lang="en-NL" sz="2400" b="1" dirty="0"/>
-              <a:t>Submitting project</a:t>
-            </a:r>
-          </a:p>
-          <a:p>
-            <a:r>
-              <a:rPr lang="en-NL" sz="2400" dirty="0">
-                <a:highlight>
-                  <a:srgbClr val="FFFF00"/>
-                </a:highlight>
-              </a:rPr>
-              <a:t>MS-Team B3STV</a:t>
-            </a:r>
-            <a:r>
-              <a:rPr lang="en-NL" sz="2400" dirty="0"/>
-              <a:t>, for:</a:t>
+              <a:rPr lang="en-US" dirty="0"/>
+              <a:t>Self-study the theory: 4h/w</a:t>
             </a:r>
           </a:p>
           <a:p>
             <a:pPr lvl="1"/>
             <a:r>
-              <a:rPr lang="en-NL" sz="2400" b="1" dirty="0"/>
-              <a:t>Submitting formalization-assignments and Proof-assignments.</a:t>
-            </a:r>
-          </a:p>
-          <a:p>
-            <a:pPr lvl="1"/>
-            <a:r>
-              <a:rPr lang="en-NL" sz="2400" b="1" dirty="0"/>
-              <a:t>Channels where you can pose questions.</a:t>
-            </a:r>
-          </a:p>
-          <a:p>
-            <a:r>
-              <a:rPr lang="en-NL" sz="2400" dirty="0"/>
-              <a:t>Lectures and werkcolleges are physical (on-site) every Tuesday and Thursday. You have the T</a:t>
-            </a:r>
-            <a:r>
-              <a:rPr lang="en-GB" sz="2400" dirty="0"/>
-              <a:t>A</a:t>
-            </a:r>
-            <a:r>
-              <a:rPr lang="en-NL" sz="2400" dirty="0"/>
-              <a:t>s during the werkcolleges.</a:t>
-            </a:r>
-          </a:p>
-          <a:p>
-            <a:r>
-              <a:rPr lang="en-NL" sz="2400" dirty="0"/>
-              <a:t>I will be monitoring Team-channels outside werkcollege hours.</a:t>
-            </a:r>
-          </a:p>
-          <a:p>
-            <a:pPr lvl="1"/>
-            <a:endParaRPr lang="en-NL" sz="2400" dirty="0"/>
-          </a:p>
-          <a:p>
-            <a:pPr lvl="1"/>
-            <a:endParaRPr lang="en-NL" sz="2400" dirty="0"/>
-          </a:p>
-          <a:p>
-            <a:endParaRPr lang="en-NL" sz="2400" dirty="0"/>
+              <a:rPr lang="en-US" dirty="0"/>
+              <a:t>Sprints for your Testing Project: 4h/w</a:t>
+            </a:r>
           </a:p>
         </p:txBody>
       </p:sp>
@@ -6136,7 +6226,7 @@
           <p:cNvPr id="4" name="Slide Number Placeholder 3">
             <a:extLst>
               <a:ext uri="{FF2B5EF4-FFF2-40B4-BE49-F238E27FC236}">
-                <a16:creationId xmlns:a16="http://schemas.microsoft.com/office/drawing/2014/main" id="{7EFB114A-706C-604E-907C-C69DBEC343E9}"/>
+                <a16:creationId xmlns:a16="http://schemas.microsoft.com/office/drawing/2014/main" id="{8C444C70-B676-444A-978B-E644F2ACD0CB}"/>
               </a:ext>
             </a:extLst>
           </p:cNvPr>
@@ -6169,7 +6259,7 @@
     </p:spTree>
     <p:extLst>
       <p:ext uri="{BB962C8B-B14F-4D97-AF65-F5344CB8AC3E}">
-        <p14:creationId xmlns:p14="http://schemas.microsoft.com/office/powerpoint/2010/main" val="312851855"/>
+        <p14:creationId xmlns:p14="http://schemas.microsoft.com/office/powerpoint/2010/main" val="1433847495"/>
       </p:ext>
     </p:extLst>
   </p:cSld>
@@ -6198,7 +6288,13 @@
       </p:grpSpPr>
       <p:sp>
         <p:nvSpPr>
-          <p:cNvPr id="2" name="Title 1"/>
+          <p:cNvPr id="2" name="Title 1">
+            <a:extLst>
+              <a:ext uri="{FF2B5EF4-FFF2-40B4-BE49-F238E27FC236}">
+                <a16:creationId xmlns:a16="http://schemas.microsoft.com/office/drawing/2014/main" id="{3A7A6B41-D037-DE47-8E85-FD7D7533DF73}"/>
+              </a:ext>
+            </a:extLst>
+          </p:cNvPr>
           <p:cNvSpPr>
             <a:spLocks noGrp="1"/>
           </p:cNvSpPr>
@@ -6212,15 +6308,21 @@
           <a:lstStyle/>
           <a:p>
             <a:r>
-              <a:rPr lang="en-US" dirty="0"/>
-              <a:t>Team</a:t>
-            </a:r>
-          </a:p>
-        </p:txBody>
-      </p:sp>
-      <p:sp>
-        <p:nvSpPr>
-          <p:cNvPr id="3" name="Content Placeholder 2"/>
+              <a:rPr lang="en-NL" dirty="0"/>
+              <a:t>Running the course</a:t>
+            </a:r>
+          </a:p>
+        </p:txBody>
+      </p:sp>
+      <p:sp>
+        <p:nvSpPr>
+          <p:cNvPr id="3" name="Content Placeholder 2">
+            <a:extLst>
+              <a:ext uri="{FF2B5EF4-FFF2-40B4-BE49-F238E27FC236}">
+                <a16:creationId xmlns:a16="http://schemas.microsoft.com/office/drawing/2014/main" id="{DB81BAEC-2F76-454F-968B-EFB6E72FC187}"/>
+              </a:ext>
+            </a:extLst>
+          </p:cNvPr>
           <p:cNvSpPr>
             <a:spLocks noGrp="1"/>
           </p:cNvSpPr>
@@ -6228,88 +6330,119 @@
             <p:ph idx="1"/>
           </p:nvPr>
         </p:nvSpPr>
-        <p:spPr/>
+        <p:spPr>
+          <a:xfrm>
+            <a:off x="251520" y="1600200"/>
+            <a:ext cx="8568952" cy="4525963"/>
+          </a:xfrm>
+        </p:spPr>
         <p:txBody>
           <a:bodyPr/>
           <a:lstStyle/>
           <a:p>
             <a:r>
-              <a:rPr lang="en-US" sz="2800" dirty="0" err="1"/>
-              <a:t>Wishnu</a:t>
-            </a:r>
-            <a:r>
-              <a:rPr lang="en-US" sz="2800" dirty="0"/>
-              <a:t> </a:t>
-            </a:r>
-            <a:r>
-              <a:rPr lang="en-US" sz="2800" dirty="0" err="1"/>
-              <a:t>Prasetya</a:t>
-            </a:r>
-            <a:r>
-              <a:rPr lang="en-US" sz="2800" dirty="0"/>
-              <a:t> (lectures, </a:t>
-            </a:r>
-            <a:r>
-              <a:rPr lang="en-US" sz="2800" dirty="0" err="1"/>
-              <a:t>werkcollege</a:t>
-            </a:r>
-            <a:r>
-              <a:rPr lang="en-US" sz="2800" dirty="0"/>
-              <a:t>, Team)</a:t>
-            </a:r>
-          </a:p>
-          <a:p>
-            <a:r>
-              <a:rPr lang="en-US" sz="2800" dirty="0"/>
-              <a:t>Paige North (lectures)</a:t>
-            </a:r>
-          </a:p>
-          <a:p>
-            <a:r>
-              <a:rPr lang="en-US" sz="2800" dirty="0"/>
-              <a:t>Lana </a:t>
-            </a:r>
-            <a:r>
-              <a:rPr lang="en-US" sz="2800" dirty="0" err="1"/>
-              <a:t>Idema</a:t>
-            </a:r>
-            <a:r>
-              <a:rPr lang="en-US" sz="2800" dirty="0"/>
-              <a:t> (TA, </a:t>
-            </a:r>
-            <a:r>
-              <a:rPr lang="en-NL" sz="2800" dirty="0"/>
-              <a:t>werkcollege)</a:t>
-            </a:r>
-          </a:p>
-          <a:p>
-            <a:r>
-              <a:rPr lang="en-GB" sz="2800" dirty="0"/>
-              <a:t>Justin Timmer </a:t>
-            </a:r>
-            <a:r>
-              <a:rPr lang="en-NL" sz="2800" dirty="0"/>
-              <a:t>(TA, werkcollege)</a:t>
-            </a:r>
-            <a:endParaRPr lang="en-GB" sz="2800" dirty="0"/>
-          </a:p>
-          <a:p>
-            <a:r>
-              <a:rPr lang="en-NL" sz="2800" dirty="0"/>
-              <a:t>Tammo Steffens (TA, werkcollege)</a:t>
-            </a:r>
-          </a:p>
-          <a:p>
-            <a:pPr marL="0" indent="0">
-              <a:buNone/>
-            </a:pPr>
-            <a:endParaRPr lang="en-NL" sz="2800" dirty="0"/>
-          </a:p>
-        </p:txBody>
-      </p:sp>
-      <p:sp>
-        <p:nvSpPr>
-          <p:cNvPr id="4" name="Slide Number Placeholder 3"/>
+              <a:rPr lang="en-NL" sz="2400" dirty="0"/>
+              <a:t>Overall week-to-week plan: see website</a:t>
+            </a:r>
+          </a:p>
+          <a:p>
+            <a:r>
+              <a:rPr lang="en-NL" sz="2400" dirty="0">
+                <a:highlight>
+                  <a:srgbClr val="FFFF00"/>
+                </a:highlight>
+              </a:rPr>
+              <a:t>Brightspace</a:t>
+            </a:r>
+            <a:r>
+              <a:rPr lang="en-NL" sz="2400" dirty="0"/>
+              <a:t>, for</a:t>
+            </a:r>
+          </a:p>
+          <a:p>
+            <a:pPr lvl="1"/>
+            <a:r>
+              <a:rPr lang="en-NL" sz="2400" b="1" dirty="0"/>
+              <a:t>Testing Quizzes</a:t>
+            </a:r>
+          </a:p>
+          <a:p>
+            <a:pPr lvl="1"/>
+            <a:r>
+              <a:rPr lang="en-NL" sz="2400" b="1" dirty="0"/>
+              <a:t>Submitting project</a:t>
+            </a:r>
+          </a:p>
+          <a:p>
+            <a:r>
+              <a:rPr lang="en-NL" sz="2400" dirty="0">
+                <a:highlight>
+                  <a:srgbClr val="FFFF00"/>
+                </a:highlight>
+              </a:rPr>
+              <a:t>MS-Team B3STV</a:t>
+            </a:r>
+            <a:r>
+              <a:rPr lang="en-NL" sz="2400" dirty="0"/>
+              <a:t>, for:</a:t>
+            </a:r>
+          </a:p>
+          <a:p>
+            <a:pPr lvl="1"/>
+            <a:r>
+              <a:rPr lang="en-NL" sz="2400" b="1" dirty="0"/>
+              <a:t>Submitting formalization-assignments and Proof-assignments.</a:t>
+            </a:r>
+          </a:p>
+          <a:p>
+            <a:pPr lvl="1"/>
+            <a:r>
+              <a:rPr lang="en-NL" sz="2400" b="1" dirty="0"/>
+              <a:t>Channels where you can pose questions.</a:t>
+            </a:r>
+          </a:p>
+          <a:p>
+            <a:r>
+              <a:rPr lang="en-NL" sz="2400" dirty="0"/>
+              <a:t>Lectures and werkcolleges are physical (on-site) every Tuesday and Thursday. You have the T</a:t>
+            </a:r>
+            <a:r>
+              <a:rPr lang="en-GB" sz="2400" dirty="0"/>
+              <a:t>A</a:t>
+            </a:r>
+            <a:r>
+              <a:rPr lang="en-NL" sz="2400" dirty="0"/>
+              <a:t>s during the werkcolleges.</a:t>
+            </a:r>
+          </a:p>
+          <a:p>
+            <a:r>
+              <a:rPr lang="en-NL" sz="2400" dirty="0"/>
+              <a:t>I will be monitoring Team-channels outside werkcollege hours.</a:t>
+            </a:r>
+          </a:p>
+          <a:p>
+            <a:pPr lvl="1"/>
+            <a:endParaRPr lang="en-NL" sz="2400" dirty="0"/>
+          </a:p>
+          <a:p>
+            <a:pPr lvl="1"/>
+            <a:endParaRPr lang="en-NL" sz="2400" dirty="0"/>
+          </a:p>
+          <a:p>
+            <a:endParaRPr lang="en-NL" sz="2400" dirty="0"/>
+          </a:p>
+        </p:txBody>
+      </p:sp>
+      <p:sp>
+        <p:nvSpPr>
+          <p:cNvPr id="4" name="Slide Number Placeholder 3">
+            <a:extLst>
+              <a:ext uri="{FF2B5EF4-FFF2-40B4-BE49-F238E27FC236}">
+                <a16:creationId xmlns:a16="http://schemas.microsoft.com/office/drawing/2014/main" id="{7EFB114A-706C-604E-907C-C69DBEC343E9}"/>
+              </a:ext>
+            </a:extLst>
+          </p:cNvPr>
           <p:cNvSpPr>
             <a:spLocks noGrp="1"/>
           </p:cNvSpPr>
@@ -6331,6 +6464,176 @@
                 <a:defRPr/>
               </a:pPr>
               <a:t>16</a:t>
+            </a:fld>
+            <a:endParaRPr lang="en-US"/>
+          </a:p>
+        </p:txBody>
+      </p:sp>
+    </p:spTree>
+    <p:extLst>
+      <p:ext uri="{BB962C8B-B14F-4D97-AF65-F5344CB8AC3E}">
+        <p14:creationId xmlns:p14="http://schemas.microsoft.com/office/powerpoint/2010/main" val="312851855"/>
+      </p:ext>
+    </p:extLst>
+  </p:cSld>
+  <p:clrMapOvr>
+    <a:masterClrMapping/>
+  </p:clrMapOvr>
+</p:sld>
+</file>
+
+<file path=ppt/slides/slide17.xml><?xml version="1.0" encoding="utf-8"?>
+<p:sld xmlns:a="http://schemas.openxmlformats.org/drawingml/2006/main" xmlns:r="http://schemas.openxmlformats.org/officeDocument/2006/relationships" xmlns:p="http://schemas.openxmlformats.org/presentationml/2006/main">
+  <p:cSld>
+    <p:spTree>
+      <p:nvGrpSpPr>
+        <p:cNvPr id="1" name=""/>
+        <p:cNvGrpSpPr/>
+        <p:nvPr/>
+      </p:nvGrpSpPr>
+      <p:grpSpPr>
+        <a:xfrm>
+          <a:off x="0" y="0"/>
+          <a:ext cx="0" cy="0"/>
+          <a:chOff x="0" y="0"/>
+          <a:chExt cx="0" cy="0"/>
+        </a:xfrm>
+      </p:grpSpPr>
+      <p:sp>
+        <p:nvSpPr>
+          <p:cNvPr id="2" name="Title 1"/>
+          <p:cNvSpPr>
+            <a:spLocks noGrp="1"/>
+          </p:cNvSpPr>
+          <p:nvPr>
+            <p:ph type="title"/>
+          </p:nvPr>
+        </p:nvSpPr>
+        <p:spPr/>
+        <p:txBody>
+          <a:bodyPr/>
+          <a:lstStyle/>
+          <a:p>
+            <a:r>
+              <a:rPr lang="en-US" dirty="0"/>
+              <a:t>Team</a:t>
+            </a:r>
+          </a:p>
+        </p:txBody>
+      </p:sp>
+      <p:sp>
+        <p:nvSpPr>
+          <p:cNvPr id="3" name="Content Placeholder 2"/>
+          <p:cNvSpPr>
+            <a:spLocks noGrp="1"/>
+          </p:cNvSpPr>
+          <p:nvPr>
+            <p:ph idx="1"/>
+          </p:nvPr>
+        </p:nvSpPr>
+        <p:spPr/>
+        <p:txBody>
+          <a:bodyPr/>
+          <a:lstStyle/>
+          <a:p>
+            <a:r>
+              <a:rPr lang="en-US" sz="2800" dirty="0" err="1"/>
+              <a:t>Wishnu</a:t>
+            </a:r>
+            <a:r>
+              <a:rPr lang="en-US" sz="2800" dirty="0"/>
+              <a:t> </a:t>
+            </a:r>
+            <a:r>
+              <a:rPr lang="en-US" sz="2800" dirty="0" err="1"/>
+              <a:t>Prasetya</a:t>
+            </a:r>
+            <a:r>
+              <a:rPr lang="en-US" sz="2800" dirty="0"/>
+              <a:t> (lectures, </a:t>
+            </a:r>
+            <a:r>
+              <a:rPr lang="en-US" sz="2800" dirty="0" err="1"/>
+              <a:t>werkcollege</a:t>
+            </a:r>
+            <a:r>
+              <a:rPr lang="en-US" sz="2800" dirty="0"/>
+              <a:t>, Team)</a:t>
+            </a:r>
+          </a:p>
+          <a:p>
+            <a:r>
+              <a:rPr lang="en-US" sz="2800" dirty="0"/>
+              <a:t>Paige North (lectures)</a:t>
+            </a:r>
+          </a:p>
+          <a:p>
+            <a:r>
+              <a:rPr lang="en-US" sz="2800" dirty="0"/>
+              <a:t>Lana </a:t>
+            </a:r>
+            <a:r>
+              <a:rPr lang="en-US" sz="2800" dirty="0" err="1"/>
+              <a:t>Idema</a:t>
+            </a:r>
+            <a:r>
+              <a:rPr lang="en-US" sz="2800" dirty="0"/>
+              <a:t> (TA, </a:t>
+            </a:r>
+            <a:r>
+              <a:rPr lang="en-NL" sz="2800" dirty="0"/>
+              <a:t>werkcollege)</a:t>
+            </a:r>
+          </a:p>
+          <a:p>
+            <a:r>
+              <a:rPr lang="en-GB" sz="2800" dirty="0"/>
+              <a:t>Justin Timmer </a:t>
+            </a:r>
+            <a:r>
+              <a:rPr lang="en-NL" sz="2800" dirty="0"/>
+              <a:t>(TA, werkcollege)</a:t>
+            </a:r>
+            <a:endParaRPr lang="en-GB" sz="2800" dirty="0"/>
+          </a:p>
+          <a:p>
+            <a:r>
+              <a:rPr lang="en-NL" sz="2800" dirty="0"/>
+              <a:t>Tammo Steffens (TA, werkcollege)</a:t>
+            </a:r>
+          </a:p>
+          <a:p>
+            <a:pPr marL="0" indent="0">
+              <a:buNone/>
+            </a:pPr>
+            <a:endParaRPr lang="en-NL" sz="2800" dirty="0"/>
+          </a:p>
+        </p:txBody>
+      </p:sp>
+      <p:sp>
+        <p:nvSpPr>
+          <p:cNvPr id="4" name="Slide Number Placeholder 3"/>
+          <p:cNvSpPr>
+            <a:spLocks noGrp="1"/>
+          </p:cNvSpPr>
+          <p:nvPr>
+            <p:ph type="sldNum" sz="quarter" idx="12"/>
+          </p:nvPr>
+        </p:nvSpPr>
+        <p:spPr/>
+        <p:txBody>
+          <a:bodyPr/>
+          <a:lstStyle/>
+          <a:p>
+            <a:pPr>
+              <a:defRPr/>
+            </a:pPr>
+            <a:fld id="{4BECC56C-10AF-4189-8868-B5974C26FAE4}" type="slidenum">
+              <a:rPr lang="en-US" smtClean="0"/>
+              <a:pPr>
+                <a:defRPr/>
+              </a:pPr>
+              <a:t>17</a:t>
             </a:fld>
             <a:endParaRPr lang="en-US"/>
           </a:p>

--- a/slides/organization.pptx
+++ b/slides/organization.pptx
@@ -22,8 +22,8 @@
     <p:sldId id="301" r:id="rId13"/>
     <p:sldId id="302" r:id="rId14"/>
     <p:sldId id="267" r:id="rId15"/>
-    <p:sldId id="296" r:id="rId16"/>
-    <p:sldId id="300" r:id="rId17"/>
+    <p:sldId id="300" r:id="rId16"/>
+    <p:sldId id="296" r:id="rId17"/>
     <p:sldId id="266" r:id="rId18"/>
   </p:sldIdLst>
   <p:sldSz cx="9144000" cy="6858000" type="screen4x3"/>
@@ -281,7 +281,7 @@
               <a:pPr>
                 <a:defRPr/>
               </a:pPr>
-              <a:t>16-04-2026</a:t>
+              <a:t>20-04-2026</a:t>
             </a:fld>
             <a:endParaRPr lang="en-US"/>
           </a:p>
@@ -1169,28 +1169,7 @@
           <a:bodyPr/>
           <a:lstStyle/>
           <a:p>
-            <a:r>
-              <a:rPr lang="en-US" dirty="0"/>
-              <a:t>Total project hours available. Assuming 8 weeks</a:t>
-            </a:r>
-          </a:p>
-          <a:p>
-            <a:r>
-              <a:rPr lang="en-US" dirty="0"/>
-              <a:t>Team of 3: 8*3*4 = 96h</a:t>
-            </a:r>
-          </a:p>
-          <a:p>
-            <a:r>
-              <a:rPr lang="en-US" dirty="0"/>
-              <a:t>Team of 3: 64h</a:t>
-            </a:r>
-          </a:p>
-          <a:p>
-            <a:r>
-              <a:rPr lang="en-US" dirty="0"/>
-              <a:t>Assumption of Testing Project load: 80h (30h Iteration 1 and 50h Iteration 2)</a:t>
-            </a:r>
+            <a:endParaRPr lang="en-US" dirty="0"/>
           </a:p>
         </p:txBody>
       </p:sp>
@@ -1226,7 +1205,7 @@
     </p:spTree>
     <p:extLst>
       <p:ext uri="{BB962C8B-B14F-4D97-AF65-F5344CB8AC3E}">
-        <p14:creationId xmlns:p14="http://schemas.microsoft.com/office/powerpoint/2010/main" val="4045915753"/>
+        <p14:creationId xmlns:p14="http://schemas.microsoft.com/office/powerpoint/2010/main" val="1668637769"/>
       </p:ext>
     </p:extLst>
   </p:cSld>
@@ -1280,7 +1259,28 @@
           <a:bodyPr/>
           <a:lstStyle/>
           <a:p>
-            <a:endParaRPr lang="en-US" dirty="0"/>
+            <a:r>
+              <a:rPr lang="en-US" dirty="0"/>
+              <a:t>Total project hours available. Assuming 8 weeks</a:t>
+            </a:r>
+          </a:p>
+          <a:p>
+            <a:r>
+              <a:rPr lang="en-US" dirty="0"/>
+              <a:t>Team of 3: 8*3*4 = 96h</a:t>
+            </a:r>
+          </a:p>
+          <a:p>
+            <a:r>
+              <a:rPr lang="en-US" dirty="0"/>
+              <a:t>Team of 3: 64h</a:t>
+            </a:r>
+          </a:p>
+          <a:p>
+            <a:r>
+              <a:rPr lang="en-US" dirty="0"/>
+              <a:t>Assumption of Testing Project load: 80h (30h Iteration 1 and 50h Iteration 2)</a:t>
+            </a:r>
           </a:p>
         </p:txBody>
       </p:sp>
@@ -1316,7 +1316,7 @@
     </p:spTree>
     <p:extLst>
       <p:ext uri="{BB962C8B-B14F-4D97-AF65-F5344CB8AC3E}">
-        <p14:creationId xmlns:p14="http://schemas.microsoft.com/office/powerpoint/2010/main" val="1668637769"/>
+        <p14:creationId xmlns:p14="http://schemas.microsoft.com/office/powerpoint/2010/main" val="4045915753"/>
       </p:ext>
     </p:extLst>
   </p:cSld>
@@ -1611,7 +1611,7 @@
               <a:pPr>
                 <a:defRPr/>
               </a:pPr>
-              <a:t>16-04-2026</a:t>
+              <a:t>20-04-2026</a:t>
             </a:fld>
             <a:endParaRPr lang="en-US"/>
           </a:p>
@@ -1801,7 +1801,7 @@
               <a:pPr>
                 <a:defRPr/>
               </a:pPr>
-              <a:t>16-04-2026</a:t>
+              <a:t>20-04-2026</a:t>
             </a:fld>
             <a:endParaRPr lang="en-US"/>
           </a:p>
@@ -2001,7 +2001,7 @@
               <a:pPr>
                 <a:defRPr/>
               </a:pPr>
-              <a:t>16-04-2026</a:t>
+              <a:t>20-04-2026</a:t>
             </a:fld>
             <a:endParaRPr lang="en-US"/>
           </a:p>
@@ -2197,7 +2197,7 @@
               <a:pPr>
                 <a:defRPr/>
               </a:pPr>
-              <a:t>16-04-2026</a:t>
+              <a:t>20-04-2026</a:t>
             </a:fld>
             <a:endParaRPr lang="en-US"/>
           </a:p>
@@ -2464,7 +2464,7 @@
               <a:pPr>
                 <a:defRPr/>
               </a:pPr>
-              <a:t>16-04-2026</a:t>
+              <a:t>20-04-2026</a:t>
             </a:fld>
             <a:endParaRPr lang="en-US"/>
           </a:p>
@@ -2771,7 +2771,7 @@
               <a:pPr>
                 <a:defRPr/>
               </a:pPr>
-              <a:t>16-04-2026</a:t>
+              <a:t>20-04-2026</a:t>
             </a:fld>
             <a:endParaRPr lang="en-US"/>
           </a:p>
@@ -3212,7 +3212,7 @@
               <a:pPr>
                 <a:defRPr/>
               </a:pPr>
-              <a:t>16-04-2026</a:t>
+              <a:t>20-04-2026</a:t>
             </a:fld>
             <a:endParaRPr lang="en-US"/>
           </a:p>
@@ -3351,7 +3351,7 @@
               <a:pPr>
                 <a:defRPr/>
               </a:pPr>
-              <a:t>16-04-2026</a:t>
+              <a:t>20-04-2026</a:t>
             </a:fld>
             <a:endParaRPr lang="en-US"/>
           </a:p>
@@ -3468,7 +3468,7 @@
               <a:pPr>
                 <a:defRPr/>
               </a:pPr>
-              <a:t>16-04-2026</a:t>
+              <a:t>20-04-2026</a:t>
             </a:fld>
             <a:endParaRPr lang="en-US"/>
           </a:p>
@@ -3765,7 +3765,7 @@
               <a:pPr>
                 <a:defRPr/>
               </a:pPr>
-              <a:t>16-04-2026</a:t>
+              <a:t>20-04-2026</a:t>
             </a:fld>
             <a:endParaRPr lang="en-US"/>
           </a:p>
@@ -4042,7 +4042,7 @@
               <a:pPr>
                 <a:defRPr/>
               </a:pPr>
-              <a:t>16-04-2026</a:t>
+              <a:t>20-04-2026</a:t>
             </a:fld>
             <a:endParaRPr lang="en-US"/>
           </a:p>
@@ -4298,7 +4298,7 @@
               <a:pPr>
                 <a:defRPr/>
               </a:pPr>
-              <a:t>16-04-2026</a:t>
+              <a:t>20-04-2026</a:t>
             </a:fld>
             <a:endParaRPr lang="en-US"/>
           </a:p>
@@ -6127,7 +6127,7 @@
           <p:cNvPr id="2" name="Title 1">
             <a:extLst>
               <a:ext uri="{FF2B5EF4-FFF2-40B4-BE49-F238E27FC236}">
-                <a16:creationId xmlns:a16="http://schemas.microsoft.com/office/drawing/2014/main" id="{3773F4C6-8D06-684B-B30C-2560B1AE507B}"/>
+                <a16:creationId xmlns:a16="http://schemas.microsoft.com/office/drawing/2014/main" id="{3A7A6B41-D037-DE47-8E85-FD7D7533DF73}"/>
               </a:ext>
             </a:extLst>
           </p:cNvPr>
@@ -6144,8 +6144,8 @@
           <a:lstStyle/>
           <a:p>
             <a:r>
-              <a:rPr lang="en-US" dirty="0"/>
-              <a:t>Load</a:t>
+              <a:rPr lang="en-NL" dirty="0"/>
+              <a:t>Running the course</a:t>
             </a:r>
           </a:p>
         </p:txBody>
@@ -6155,7 +6155,7 @@
           <p:cNvPr id="3" name="Content Placeholder 2">
             <a:extLst>
               <a:ext uri="{FF2B5EF4-FFF2-40B4-BE49-F238E27FC236}">
-                <a16:creationId xmlns:a16="http://schemas.microsoft.com/office/drawing/2014/main" id="{01C270F8-1FAA-4F49-827C-8320C9004E86}"/>
+                <a16:creationId xmlns:a16="http://schemas.microsoft.com/office/drawing/2014/main" id="{DB81BAEC-2F76-454F-968B-EFB6E72FC187}"/>
               </a:ext>
             </a:extLst>
           </p:cNvPr>
@@ -6166,58 +6166,107 @@
             <p:ph idx="1"/>
           </p:nvPr>
         </p:nvSpPr>
-        <p:spPr/>
+        <p:spPr>
+          <a:xfrm>
+            <a:off x="251520" y="1600200"/>
+            <a:ext cx="8568952" cy="4525963"/>
+          </a:xfrm>
+        </p:spPr>
         <p:txBody>
           <a:bodyPr/>
           <a:lstStyle/>
           <a:p>
             <a:r>
-              <a:rPr lang="en-US" dirty="0"/>
-              <a:t>We have a pretty dense </a:t>
-            </a:r>
-            <a:r>
-              <a:rPr lang="en-US" dirty="0" err="1"/>
-              <a:t>programme</a:t>
-            </a:r>
-            <a:r>
-              <a:rPr lang="en-US" dirty="0"/>
-              <a:t>. Expect to commit at least 16hrs/week.</a:t>
-            </a:r>
-          </a:p>
-          <a:p>
-            <a:r>
-              <a:rPr lang="en-US" dirty="0"/>
-              <a:t>Suggested plan:</a:t>
+              <a:rPr lang="en-NL" sz="2400" dirty="0"/>
+              <a:t>Overall week-to-week plan: see website</a:t>
+            </a:r>
+          </a:p>
+          <a:p>
+            <a:r>
+              <a:rPr lang="en-NL" sz="2400" dirty="0">
+                <a:highlight>
+                  <a:srgbClr val="FFFF00"/>
+                </a:highlight>
+              </a:rPr>
+              <a:t>Brightspace</a:t>
+            </a:r>
+            <a:r>
+              <a:rPr lang="en-NL" sz="2400" dirty="0"/>
+              <a:t>, for</a:t>
             </a:r>
           </a:p>
           <a:p>
             <a:pPr lvl="1"/>
             <a:r>
-              <a:rPr lang="en-US" dirty="0"/>
-              <a:t>Lectures + lab/</a:t>
-            </a:r>
-            <a:r>
-              <a:rPr lang="en-US" dirty="0" err="1"/>
-              <a:t>wekcollege</a:t>
-            </a:r>
-            <a:r>
-              <a:rPr lang="en-US" dirty="0"/>
-              <a:t> sessions: 8h/w</a:t>
+              <a:rPr lang="en-NL" sz="2400" b="1" dirty="0"/>
+              <a:t>Testing Quizzes</a:t>
             </a:r>
           </a:p>
           <a:p>
             <a:pPr lvl="1"/>
             <a:r>
-              <a:rPr lang="en-US" dirty="0"/>
-              <a:t>Self-study the theory: 4h/w</a:t>
+              <a:rPr lang="en-NL" sz="2400" b="1" dirty="0"/>
+              <a:t>Submitting project</a:t>
+            </a:r>
+          </a:p>
+          <a:p>
+            <a:r>
+              <a:rPr lang="en-NL" sz="2400" dirty="0">
+                <a:highlight>
+                  <a:srgbClr val="FFFF00"/>
+                </a:highlight>
+              </a:rPr>
+              <a:t>MS-Team B3STV</a:t>
+            </a:r>
+            <a:r>
+              <a:rPr lang="en-NL" sz="2400" dirty="0"/>
+              <a:t>, for:</a:t>
             </a:r>
           </a:p>
           <a:p>
             <a:pPr lvl="1"/>
             <a:r>
-              <a:rPr lang="en-US" dirty="0"/>
-              <a:t>Sprints for your Testing Project: 4h/w</a:t>
-            </a:r>
+              <a:rPr lang="en-NL" sz="2400" b="1" dirty="0"/>
+              <a:t>Submitting formalization-assignments and Proof-assignments.</a:t>
+            </a:r>
+          </a:p>
+          <a:p>
+            <a:pPr lvl="1"/>
+            <a:r>
+              <a:rPr lang="en-NL" sz="2400" b="1" dirty="0"/>
+              <a:t>Channels where you can pose questions.</a:t>
+            </a:r>
+          </a:p>
+          <a:p>
+            <a:r>
+              <a:rPr lang="en-NL" sz="2400" dirty="0"/>
+              <a:t>Lectures and werkcolleges are on-site every Tuesday and Thursday. You have T</a:t>
+            </a:r>
+            <a:r>
+              <a:rPr lang="en-GB" sz="2400" dirty="0"/>
+              <a:t>A</a:t>
+            </a:r>
+            <a:r>
+              <a:rPr lang="en-NL" sz="2400" dirty="0"/>
+              <a:t>s during the werkcolleges.</a:t>
+            </a:r>
+          </a:p>
+          <a:p>
+            <a:r>
+              <a:rPr lang="en-NL" sz="2400" dirty="0"/>
+              <a:t>I will be monitoring Team-channels outside werkcollege hours.</a:t>
+            </a:r>
+          </a:p>
+          <a:p>
+            <a:pPr lvl="1"/>
+            <a:endParaRPr lang="en-NL" sz="2400" dirty="0"/>
+          </a:p>
+          <a:p>
+            <a:pPr lvl="1"/>
+            <a:endParaRPr lang="en-NL" sz="2400" dirty="0"/>
+          </a:p>
+          <a:p>
+            <a:endParaRPr lang="en-NL" sz="2400" dirty="0"/>
           </a:p>
         </p:txBody>
       </p:sp>
@@ -6226,7 +6275,7 @@
           <p:cNvPr id="4" name="Slide Number Placeholder 3">
             <a:extLst>
               <a:ext uri="{FF2B5EF4-FFF2-40B4-BE49-F238E27FC236}">
-                <a16:creationId xmlns:a16="http://schemas.microsoft.com/office/drawing/2014/main" id="{8C444C70-B676-444A-978B-E644F2ACD0CB}"/>
+                <a16:creationId xmlns:a16="http://schemas.microsoft.com/office/drawing/2014/main" id="{7EFB114A-706C-604E-907C-C69DBEC343E9}"/>
               </a:ext>
             </a:extLst>
           </p:cNvPr>
@@ -6259,7 +6308,7 @@
     </p:spTree>
     <p:extLst>
       <p:ext uri="{BB962C8B-B14F-4D97-AF65-F5344CB8AC3E}">
-        <p14:creationId xmlns:p14="http://schemas.microsoft.com/office/powerpoint/2010/main" val="1433847495"/>
+        <p14:creationId xmlns:p14="http://schemas.microsoft.com/office/powerpoint/2010/main" val="312851855"/>
       </p:ext>
     </p:extLst>
   </p:cSld>
@@ -6291,7 +6340,7 @@
           <p:cNvPr id="2" name="Title 1">
             <a:extLst>
               <a:ext uri="{FF2B5EF4-FFF2-40B4-BE49-F238E27FC236}">
-                <a16:creationId xmlns:a16="http://schemas.microsoft.com/office/drawing/2014/main" id="{3A7A6B41-D037-DE47-8E85-FD7D7533DF73}"/>
+                <a16:creationId xmlns:a16="http://schemas.microsoft.com/office/drawing/2014/main" id="{3773F4C6-8D06-684B-B30C-2560B1AE507B}"/>
               </a:ext>
             </a:extLst>
           </p:cNvPr>
@@ -6308,8 +6357,8 @@
           <a:lstStyle/>
           <a:p>
             <a:r>
-              <a:rPr lang="en-NL" dirty="0"/>
-              <a:t>Running the course</a:t>
+              <a:rPr lang="en-US" dirty="0"/>
+              <a:t>Load</a:t>
             </a:r>
           </a:p>
         </p:txBody>
@@ -6319,7 +6368,7 @@
           <p:cNvPr id="3" name="Content Placeholder 2">
             <a:extLst>
               <a:ext uri="{FF2B5EF4-FFF2-40B4-BE49-F238E27FC236}">
-                <a16:creationId xmlns:a16="http://schemas.microsoft.com/office/drawing/2014/main" id="{DB81BAEC-2F76-454F-968B-EFB6E72FC187}"/>
+                <a16:creationId xmlns:a16="http://schemas.microsoft.com/office/drawing/2014/main" id="{01C270F8-1FAA-4F49-827C-8320C9004E86}"/>
               </a:ext>
             </a:extLst>
           </p:cNvPr>
@@ -6330,107 +6379,58 @@
             <p:ph idx="1"/>
           </p:nvPr>
         </p:nvSpPr>
-        <p:spPr>
-          <a:xfrm>
-            <a:off x="251520" y="1600200"/>
-            <a:ext cx="8568952" cy="4525963"/>
-          </a:xfrm>
-        </p:spPr>
+        <p:spPr/>
         <p:txBody>
           <a:bodyPr/>
           <a:lstStyle/>
           <a:p>
             <a:r>
-              <a:rPr lang="en-NL" sz="2400" dirty="0"/>
-              <a:t>Overall week-to-week plan: see website</a:t>
-            </a:r>
-          </a:p>
-          <a:p>
-            <a:r>
-              <a:rPr lang="en-NL" sz="2400" dirty="0">
-                <a:highlight>
-                  <a:srgbClr val="FFFF00"/>
-                </a:highlight>
-              </a:rPr>
-              <a:t>Brightspace</a:t>
-            </a:r>
-            <a:r>
-              <a:rPr lang="en-NL" sz="2400" dirty="0"/>
-              <a:t>, for</a:t>
+              <a:rPr lang="en-US" dirty="0"/>
+              <a:t>We have a pretty dense </a:t>
+            </a:r>
+            <a:r>
+              <a:rPr lang="en-US" dirty="0" err="1"/>
+              <a:t>programme</a:t>
+            </a:r>
+            <a:r>
+              <a:rPr lang="en-US" dirty="0"/>
+              <a:t>. Expect to commit at least 16hrs/week.</a:t>
+            </a:r>
+          </a:p>
+          <a:p>
+            <a:r>
+              <a:rPr lang="en-US" dirty="0"/>
+              <a:t>Suggested plan:</a:t>
             </a:r>
           </a:p>
           <a:p>
             <a:pPr lvl="1"/>
             <a:r>
-              <a:rPr lang="en-NL" sz="2400" b="1" dirty="0"/>
-              <a:t>Testing Quizzes</a:t>
+              <a:rPr lang="en-US" dirty="0"/>
+              <a:t>Lectures + lab/</a:t>
+            </a:r>
+            <a:r>
+              <a:rPr lang="en-US" dirty="0" err="1"/>
+              <a:t>wekcollege</a:t>
+            </a:r>
+            <a:r>
+              <a:rPr lang="en-US" dirty="0"/>
+              <a:t> sessions: 8h/w</a:t>
             </a:r>
           </a:p>
           <a:p>
             <a:pPr lvl="1"/>
             <a:r>
-              <a:rPr lang="en-NL" sz="2400" b="1" dirty="0"/>
-              <a:t>Submitting project</a:t>
-            </a:r>
-          </a:p>
-          <a:p>
-            <a:r>
-              <a:rPr lang="en-NL" sz="2400" dirty="0">
-                <a:highlight>
-                  <a:srgbClr val="FFFF00"/>
-                </a:highlight>
-              </a:rPr>
-              <a:t>MS-Team B3STV</a:t>
-            </a:r>
-            <a:r>
-              <a:rPr lang="en-NL" sz="2400" dirty="0"/>
-              <a:t>, for:</a:t>
+              <a:rPr lang="en-US" dirty="0"/>
+              <a:t>Self-study the theory: 4h/w</a:t>
             </a:r>
           </a:p>
           <a:p>
             <a:pPr lvl="1"/>
             <a:r>
-              <a:rPr lang="en-NL" sz="2400" b="1" dirty="0"/>
-              <a:t>Submitting formalization-assignments and Proof-assignments.</a:t>
-            </a:r>
-          </a:p>
-          <a:p>
-            <a:pPr lvl="1"/>
-            <a:r>
-              <a:rPr lang="en-NL" sz="2400" b="1" dirty="0"/>
-              <a:t>Channels where you can pose questions.</a:t>
-            </a:r>
-          </a:p>
-          <a:p>
-            <a:r>
-              <a:rPr lang="en-NL" sz="2400" dirty="0"/>
-              <a:t>Lectures and werkcolleges are physical (on-site) every Tuesday and Thursday. You have the T</a:t>
-            </a:r>
-            <a:r>
-              <a:rPr lang="en-GB" sz="2400" dirty="0"/>
-              <a:t>A</a:t>
-            </a:r>
-            <a:r>
-              <a:rPr lang="en-NL" sz="2400" dirty="0"/>
-              <a:t>s during the werkcolleges.</a:t>
-            </a:r>
-          </a:p>
-          <a:p>
-            <a:r>
-              <a:rPr lang="en-NL" sz="2400" dirty="0"/>
-              <a:t>I will be monitoring Team-channels outside werkcollege hours.</a:t>
-            </a:r>
-          </a:p>
-          <a:p>
-            <a:pPr lvl="1"/>
-            <a:endParaRPr lang="en-NL" sz="2400" dirty="0"/>
-          </a:p>
-          <a:p>
-            <a:pPr lvl="1"/>
-            <a:endParaRPr lang="en-NL" sz="2400" dirty="0"/>
-          </a:p>
-          <a:p>
-            <a:endParaRPr lang="en-NL" sz="2400" dirty="0"/>
+              <a:rPr lang="en-US" dirty="0"/>
+              <a:t>Sprints for your Testing Project: 4h/w</a:t>
+            </a:r>
           </a:p>
         </p:txBody>
       </p:sp>
@@ -6439,7 +6439,7 @@
           <p:cNvPr id="4" name="Slide Number Placeholder 3">
             <a:extLst>
               <a:ext uri="{FF2B5EF4-FFF2-40B4-BE49-F238E27FC236}">
-                <a16:creationId xmlns:a16="http://schemas.microsoft.com/office/drawing/2014/main" id="{7EFB114A-706C-604E-907C-C69DBEC343E9}"/>
+                <a16:creationId xmlns:a16="http://schemas.microsoft.com/office/drawing/2014/main" id="{8C444C70-B676-444A-978B-E644F2ACD0CB}"/>
               </a:ext>
             </a:extLst>
           </p:cNvPr>
@@ -6472,7 +6472,7 @@
     </p:spTree>
     <p:extLst>
       <p:ext uri="{BB962C8B-B14F-4D97-AF65-F5344CB8AC3E}">
-        <p14:creationId xmlns:p14="http://schemas.microsoft.com/office/powerpoint/2010/main" val="312851855"/>
+        <p14:creationId xmlns:p14="http://schemas.microsoft.com/office/powerpoint/2010/main" val="1433847495"/>
       </p:ext>
     </p:extLst>
   </p:cSld>
